--- a/JAVA教學.pptx
+++ b/JAVA教學.pptx
@@ -5,7 +5,7 @@
     <p:sldMasterId id="2147483691" r:id="rId1"/>
   </p:sldMasterIdLst>
   <p:notesMasterIdLst>
-    <p:notesMasterId r:id="rId20"/>
+    <p:notesMasterId r:id="rId17"/>
   </p:notesMasterIdLst>
   <p:sldIdLst>
     <p:sldId id="256" r:id="rId2"/>
@@ -21,11 +21,8 @@
     <p:sldId id="269" r:id="rId12"/>
     <p:sldId id="270" r:id="rId13"/>
     <p:sldId id="275" r:id="rId14"/>
-    <p:sldId id="262" r:id="rId15"/>
-    <p:sldId id="261" r:id="rId16"/>
-    <p:sldId id="260" r:id="rId17"/>
-    <p:sldId id="264" r:id="rId18"/>
-    <p:sldId id="276" r:id="rId19"/>
+    <p:sldId id="264" r:id="rId15"/>
+    <p:sldId id="276" r:id="rId16"/>
   </p:sldIdLst>
   <p:sldSz cx="12192000" cy="6858000"/>
   <p:notesSz cx="6858000" cy="9144000"/>
@@ -214,7 +211,7 @@
           <a:p>
             <a:fld id="{AD374780-3BA8-45C4-96B3-E4DA451B952B}" type="datetimeFigureOut">
               <a:rPr lang="zh-TW" altLang="en-US" smtClean="0"/>
-              <a:t>2026/5/27</a:t>
+              <a:t>2026/5/28</a:t>
             </a:fld>
             <a:endParaRPr lang="zh-TW" altLang="en-US"/>
           </a:p>
@@ -1885,34 +1882,12 @@
           <a:lstStyle/>
           <a:p>
             <a:r>
-              <a:rPr lang="zh-TW" altLang="en-US" dirty="0"/>
-              <a:t>接下來我們用一個簡單的問候系統，把三層串起來看。</a:t>
-            </a:r>
-            <a:br>
-              <a:rPr lang="zh-TW" altLang="en-US" dirty="0"/>
-            </a:br>
-            <a:r>
-              <a:rPr lang="zh-TW" altLang="en-US" dirty="0"/>
-              <a:t>首先是 </a:t>
-            </a:r>
-            <a:r>
               <a:rPr lang="en-US" altLang="zh-TW" dirty="0"/>
-              <a:t>Controller</a:t>
-            </a:r>
-            <a:r>
-              <a:rPr lang="zh-TW" altLang="en-US" dirty="0"/>
-              <a:t>。</a:t>
-            </a:r>
-            <a:br>
-              <a:rPr lang="zh-TW" altLang="en-US" dirty="0"/>
-            </a:br>
-            <a:r>
-              <a:rPr lang="en-US" altLang="zh-TW" dirty="0"/>
-              <a:t>@RestController </a:t>
-            </a:r>
-            <a:r>
-              <a:rPr lang="zh-TW" altLang="en-US" dirty="0"/>
-              <a:t>表示這是一個 </a:t>
+              <a:t>1. Controller </a:t>
+            </a:r>
+            <a:r>
+              <a:rPr lang="zh-TW" altLang="en-US" dirty="0"/>
+              <a:t>是 </a:t>
             </a:r>
             <a:r>
               <a:rPr lang="en-US" altLang="zh-TW" dirty="0"/>
@@ -1920,89 +1895,79 @@
             </a:r>
             <a:r>
               <a:rPr lang="zh-TW" altLang="en-US" dirty="0"/>
-              <a:t>入口。</a:t>
-            </a:r>
-            <a:br>
-              <a:rPr lang="zh-TW" altLang="en-US" dirty="0"/>
-            </a:br>
+              <a:t>入口</a:t>
+            </a:r>
+            <a:endParaRPr lang="en-US" altLang="zh-TW" dirty="0"/>
+          </a:p>
+          <a:p>
             <a:r>
               <a:rPr lang="en-US" altLang="zh-TW" dirty="0"/>
-              <a:t>@GetMapping("/hello") </a:t>
-            </a:r>
-            <a:r>
-              <a:rPr lang="zh-TW" altLang="en-US" dirty="0"/>
-              <a:t>表示前端呼叫 </a:t>
-            </a:r>
+              <a:t>2. Controller </a:t>
+            </a:r>
+            <a:r>
+              <a:rPr lang="zh-TW" altLang="en-US" dirty="0"/>
+              <a:t>負責接收前端資料</a:t>
+            </a:r>
+            <a:endParaRPr lang="en-US" altLang="zh-TW" dirty="0"/>
+          </a:p>
+          <a:p>
             <a:r>
               <a:rPr lang="en-US" altLang="zh-TW" dirty="0"/>
-              <a:t>/hello </a:t>
-            </a:r>
-            <a:r>
-              <a:rPr lang="zh-TW" altLang="en-US" dirty="0"/>
-              <a:t>時，會執行 </a:t>
-            </a:r>
-            <a:r>
-              <a:rPr lang="en-US" altLang="zh-TW" dirty="0" err="1"/>
-              <a:t>sayHello</a:t>
-            </a:r>
+              <a:t>3.</a:t>
+            </a:r>
+            <a:r>
+              <a:rPr lang="zh-TW" altLang="en-US" dirty="0"/>
+              <a:t>屬於登入前的規則判斷</a:t>
+            </a:r>
+            <a:endParaRPr lang="en-US" altLang="zh-TW" dirty="0"/>
+          </a:p>
+          <a:p>
             <a:r>
               <a:rPr lang="en-US" altLang="zh-TW" dirty="0"/>
-              <a:t>()</a:t>
-            </a:r>
-            <a:r>
-              <a:rPr lang="zh-TW" altLang="en-US" dirty="0"/>
-              <a:t>。</a:t>
-            </a:r>
-            <a:br>
-              <a:rPr lang="zh-TW" altLang="en-US" dirty="0"/>
-            </a:br>
-            <a:r>
-              <a:rPr lang="zh-TW" altLang="en-US" dirty="0"/>
-              <a:t>但 </a:t>
-            </a:r>
+              <a:t>4.</a:t>
+            </a:r>
+            <a:r>
+              <a:rPr lang="zh-TW" altLang="en-US" dirty="0"/>
+              <a:t>屬於資料查詢</a:t>
+            </a:r>
+            <a:endParaRPr lang="en-US" altLang="zh-TW" dirty="0"/>
+          </a:p>
+          <a:p>
             <a:r>
               <a:rPr lang="en-US" altLang="zh-TW" dirty="0"/>
-              <a:t>Controller </a:t>
-            </a:r>
-            <a:r>
-              <a:rPr lang="zh-TW" altLang="en-US" dirty="0"/>
-              <a:t>不自己產生問候語，而是呼叫 </a:t>
-            </a:r>
-            <a:r>
-              <a:rPr lang="en-US" altLang="zh-TW" dirty="0" err="1"/>
-              <a:t>greetService.makeGreeting</a:t>
-            </a:r>
+              <a:t>5.</a:t>
+            </a:r>
+            <a:r>
+              <a:rPr lang="zh-TW" altLang="en-US" dirty="0"/>
+              <a:t>屬於登入邏輯</a:t>
+            </a:r>
+            <a:endParaRPr lang="en-US" altLang="zh-TW" dirty="0"/>
+          </a:p>
+          <a:p>
             <a:r>
               <a:rPr lang="en-US" altLang="zh-TW" dirty="0"/>
-              <a:t>()</a:t>
-            </a:r>
-            <a:r>
-              <a:rPr lang="zh-TW" altLang="en-US" dirty="0"/>
-              <a:t>。</a:t>
-            </a:r>
-            <a:br>
-              <a:rPr lang="zh-TW" altLang="en-US" dirty="0"/>
-            </a:br>
-            <a:r>
-              <a:rPr lang="zh-TW" altLang="en-US" dirty="0"/>
-              <a:t>也就是說，</a:t>
-            </a:r>
+              <a:t>6.</a:t>
+            </a:r>
+            <a:r>
+              <a:rPr lang="zh-TW" altLang="en-US" dirty="0"/>
+              <a:t>屬於商業邏輯判斷</a:t>
+            </a:r>
+            <a:endParaRPr lang="en-US" altLang="zh-TW" dirty="0"/>
+          </a:p>
+          <a:p>
             <a:r>
               <a:rPr lang="en-US" altLang="zh-TW" dirty="0"/>
-              <a:t>Controller </a:t>
-            </a:r>
-            <a:r>
-              <a:rPr lang="zh-TW" altLang="en-US" dirty="0"/>
-              <a:t>只負責接收請求、呼叫 </a:t>
+              <a:t>7.Controller </a:t>
+            </a:r>
+            <a:r>
+              <a:rPr lang="zh-TW" altLang="en-US" dirty="0"/>
+              <a:t>負責回傳 </a:t>
             </a:r>
             <a:r>
               <a:rPr lang="en-US" altLang="zh-TW" dirty="0"/>
-              <a:t>Service</a:t>
-            </a:r>
-            <a:r>
-              <a:rPr lang="zh-TW" altLang="en-US" dirty="0"/>
-              <a:t>、回傳結果。</a:t>
-            </a:r>
+              <a:t>response</a:t>
+            </a:r>
+            <a:endParaRPr lang="zh-TW" altLang="en-US" dirty="0"/>
           </a:p>
         </p:txBody>
       </p:sp>
@@ -2032,7 +1997,7 @@
     </p:spTree>
     <p:extLst>
       <p:ext uri="{BB962C8B-B14F-4D97-AF65-F5344CB8AC3E}">
-        <p14:creationId xmlns:p14="http://schemas.microsoft.com/office/powerpoint/2010/main" val="2345829906"/>
+        <p14:creationId xmlns:p14="http://schemas.microsoft.com/office/powerpoint/2010/main" val="3686518294"/>
       </p:ext>
     </p:extLst>
   </p:cSld>
@@ -2086,87 +2051,7 @@
           <a:bodyPr/>
           <a:lstStyle/>
           <a:p>
-            <a:r>
-              <a:rPr lang="en-US" altLang="zh-TW" dirty="0" err="1"/>
-              <a:t>GreetService</a:t>
-            </a:r>
-            <a:r>
-              <a:rPr lang="en-US" altLang="zh-TW" dirty="0"/>
-              <a:t> </a:t>
-            </a:r>
-            <a:r>
-              <a:rPr lang="zh-TW" altLang="en-US" dirty="0"/>
-              <a:t>負責產生問候語。</a:t>
-            </a:r>
-            <a:br>
-              <a:rPr lang="zh-TW" altLang="en-US" dirty="0"/>
-            </a:br>
-            <a:r>
-              <a:rPr lang="zh-TW" altLang="en-US" dirty="0"/>
-              <a:t>它需要名字，所以它呼叫 </a:t>
-            </a:r>
-            <a:r>
-              <a:rPr lang="en-US" altLang="zh-TW" dirty="0" err="1"/>
-              <a:t>nameRepo.getNameFromDB</a:t>
-            </a:r>
-            <a:r>
-              <a:rPr lang="en-US" altLang="zh-TW" dirty="0"/>
-              <a:t>()</a:t>
-            </a:r>
-            <a:r>
-              <a:rPr lang="zh-TW" altLang="en-US" dirty="0"/>
-              <a:t>，請 </a:t>
-            </a:r>
-            <a:r>
-              <a:rPr lang="en-US" altLang="zh-TW" dirty="0"/>
-              <a:t>Repository </a:t>
-            </a:r>
-            <a:r>
-              <a:rPr lang="zh-TW" altLang="en-US" dirty="0"/>
-              <a:t>幫它拿資料。</a:t>
-            </a:r>
-            <a:br>
-              <a:rPr lang="zh-TW" altLang="en-US" dirty="0"/>
-            </a:br>
-            <a:r>
-              <a:rPr lang="en-US" altLang="zh-TW" dirty="0"/>
-              <a:t>Repository </a:t>
-            </a:r>
-            <a:r>
-              <a:rPr lang="zh-TW" altLang="en-US" dirty="0"/>
-              <a:t>拿回名字之後，</a:t>
-            </a:r>
-            <a:r>
-              <a:rPr lang="en-US" altLang="zh-TW" dirty="0"/>
-              <a:t>Service </a:t>
-            </a:r>
-            <a:r>
-              <a:rPr lang="zh-TW" altLang="en-US" dirty="0"/>
-              <a:t>把名字加工成一句完整的話：你好，某某某，歡迎光臨。</a:t>
-            </a:r>
-            <a:br>
-              <a:rPr lang="zh-TW" altLang="en-US" dirty="0"/>
-            </a:br>
-            <a:r>
-              <a:rPr lang="zh-TW" altLang="en-US" dirty="0"/>
-              <a:t>所以 </a:t>
-            </a:r>
-            <a:r>
-              <a:rPr lang="en-US" altLang="zh-TW" dirty="0"/>
-              <a:t>Service </a:t>
-            </a:r>
-            <a:r>
-              <a:rPr lang="zh-TW" altLang="en-US" dirty="0"/>
-              <a:t>的角色是處理邏輯，不是單純拿資料，也不是直接接 </a:t>
-            </a:r>
-            <a:r>
-              <a:rPr lang="en-US" altLang="zh-TW" dirty="0"/>
-              <a:t>API</a:t>
-            </a:r>
-            <a:r>
-              <a:rPr lang="zh-TW" altLang="en-US" dirty="0"/>
-              <a:t>。</a:t>
-            </a:r>
+            <a:endParaRPr lang="zh-TW" altLang="en-US" dirty="0"/>
           </a:p>
         </p:txBody>
       </p:sp>
@@ -2188,439 +2073,6 @@
             <a:fld id="{FC7C28FB-98DF-4E7F-9559-D67F5677BAF3}" type="slidenum">
               <a:rPr lang="zh-TW" altLang="en-US" smtClean="0"/>
               <a:t>15</a:t>
-            </a:fld>
-            <a:endParaRPr lang="zh-TW" altLang="en-US"/>
-          </a:p>
-        </p:txBody>
-      </p:sp>
-    </p:spTree>
-    <p:extLst>
-      <p:ext uri="{BB962C8B-B14F-4D97-AF65-F5344CB8AC3E}">
-        <p14:creationId xmlns:p14="http://schemas.microsoft.com/office/powerpoint/2010/main" val="3855081943"/>
-      </p:ext>
-    </p:extLst>
-  </p:cSld>
-  <p:clrMapOvr>
-    <a:masterClrMapping/>
-  </p:clrMapOvr>
-</p:notes>
-</file>
-
-<file path=ppt/notesSlides/notesSlide16.xml><?xml version="1.0" encoding="utf-8"?>
-<p:notes xmlns:a="http://schemas.openxmlformats.org/drawingml/2006/main" xmlns:r="http://schemas.openxmlformats.org/officeDocument/2006/relationships" xmlns:p="http://schemas.openxmlformats.org/presentationml/2006/main">
-  <p:cSld>
-    <p:spTree>
-      <p:nvGrpSpPr>
-        <p:cNvPr id="1" name=""/>
-        <p:cNvGrpSpPr/>
-        <p:nvPr/>
-      </p:nvGrpSpPr>
-      <p:grpSpPr>
-        <a:xfrm>
-          <a:off x="0" y="0"/>
-          <a:ext cx="0" cy="0"/>
-          <a:chOff x="0" y="0"/>
-          <a:chExt cx="0" cy="0"/>
-        </a:xfrm>
-      </p:grpSpPr>
-      <p:sp>
-        <p:nvSpPr>
-          <p:cNvPr id="2" name="投影片影像版面配置區 1"/>
-          <p:cNvSpPr>
-            <a:spLocks noGrp="1" noRot="1" noChangeAspect="1"/>
-          </p:cNvSpPr>
-          <p:nvPr>
-            <p:ph type="sldImg"/>
-          </p:nvPr>
-        </p:nvSpPr>
-        <p:spPr/>
-      </p:sp>
-      <p:sp>
-        <p:nvSpPr>
-          <p:cNvPr id="3" name="備忘稿版面配置區 2"/>
-          <p:cNvSpPr>
-            <a:spLocks noGrp="1"/>
-          </p:cNvSpPr>
-          <p:nvPr>
-            <p:ph type="body" idx="1"/>
-          </p:nvPr>
-        </p:nvSpPr>
-        <p:spPr/>
-        <p:txBody>
-          <a:bodyPr/>
-          <a:lstStyle/>
-          <a:p>
-            <a:r>
-              <a:rPr lang="zh-TW" altLang="en-US" dirty="0"/>
-              <a:t>這裡用 </a:t>
-            </a:r>
-            <a:r>
-              <a:rPr lang="en-US" altLang="zh-TW" dirty="0" err="1"/>
-              <a:t>NameRepository</a:t>
-            </a:r>
-            <a:r>
-              <a:rPr lang="en-US" altLang="zh-TW" dirty="0"/>
-              <a:t> </a:t>
-            </a:r>
-            <a:r>
-              <a:rPr lang="zh-TW" altLang="en-US" dirty="0"/>
-              <a:t>模擬資料庫，直接回傳「王小明」。</a:t>
-            </a:r>
-            <a:br>
-              <a:rPr lang="zh-TW" altLang="en-US" dirty="0"/>
-            </a:br>
-            <a:r>
-              <a:rPr lang="zh-TW" altLang="en-US" dirty="0"/>
-              <a:t>現在看起來很簡單，但它代表的是資料來源。</a:t>
-            </a:r>
-            <a:br>
-              <a:rPr lang="zh-TW" altLang="en-US" dirty="0"/>
-            </a:br>
-            <a:r>
-              <a:rPr lang="zh-TW" altLang="en-US" dirty="0"/>
-              <a:t>也就是說，</a:t>
-            </a:r>
-            <a:r>
-              <a:rPr lang="en-US" altLang="zh-TW" dirty="0"/>
-              <a:t>Service </a:t>
-            </a:r>
-            <a:r>
-              <a:rPr lang="zh-TW" altLang="en-US" dirty="0"/>
-              <a:t>不需要知道名字到底是從資料庫、</a:t>
-            </a:r>
-            <a:r>
-              <a:rPr lang="en-US" altLang="zh-TW" dirty="0"/>
-              <a:t>API</a:t>
-            </a:r>
-            <a:r>
-              <a:rPr lang="zh-TW" altLang="en-US" dirty="0"/>
-              <a:t>、檔案還是假資料來的。</a:t>
-            </a:r>
-            <a:br>
-              <a:rPr lang="zh-TW" altLang="en-US" dirty="0"/>
-            </a:br>
-            <a:r>
-              <a:rPr lang="en-US" altLang="zh-TW" dirty="0"/>
-              <a:t>Service </a:t>
-            </a:r>
-            <a:r>
-              <a:rPr lang="zh-TW" altLang="en-US" dirty="0"/>
-              <a:t>只需要呼叫 </a:t>
-            </a:r>
-            <a:r>
-              <a:rPr lang="en-US" altLang="zh-TW" dirty="0"/>
-              <a:t>Repository</a:t>
-            </a:r>
-            <a:r>
-              <a:rPr lang="zh-TW" altLang="en-US" dirty="0"/>
-              <a:t>。</a:t>
-            </a:r>
-            <a:br>
-              <a:rPr lang="zh-TW" altLang="en-US" dirty="0"/>
-            </a:br>
-            <a:r>
-              <a:rPr lang="zh-TW" altLang="en-US" dirty="0"/>
-              <a:t>這樣未來如果資料來源要改，主要修改 </a:t>
-            </a:r>
-            <a:r>
-              <a:rPr lang="en-US" altLang="zh-TW" dirty="0"/>
-              <a:t>Repository </a:t>
-            </a:r>
-            <a:r>
-              <a:rPr lang="zh-TW" altLang="en-US" dirty="0"/>
-              <a:t>就好，不需要大改 </a:t>
-            </a:r>
-            <a:r>
-              <a:rPr lang="en-US" altLang="zh-TW" dirty="0"/>
-              <a:t>Controller </a:t>
-            </a:r>
-            <a:r>
-              <a:rPr lang="zh-TW" altLang="en-US" dirty="0"/>
-              <a:t>或 </a:t>
-            </a:r>
-            <a:r>
-              <a:rPr lang="en-US" altLang="zh-TW" dirty="0"/>
-              <a:t>Service</a:t>
-            </a:r>
-            <a:r>
-              <a:rPr lang="zh-TW" altLang="en-US" dirty="0"/>
-              <a:t>。</a:t>
-            </a:r>
-          </a:p>
-        </p:txBody>
-      </p:sp>
-      <p:sp>
-        <p:nvSpPr>
-          <p:cNvPr id="4" name="投影片編號版面配置區 3"/>
-          <p:cNvSpPr>
-            <a:spLocks noGrp="1"/>
-          </p:cNvSpPr>
-          <p:nvPr>
-            <p:ph type="sldNum" sz="quarter" idx="5"/>
-          </p:nvPr>
-        </p:nvSpPr>
-        <p:spPr/>
-        <p:txBody>
-          <a:bodyPr/>
-          <a:lstStyle/>
-          <a:p>
-            <a:fld id="{FC7C28FB-98DF-4E7F-9559-D67F5677BAF3}" type="slidenum">
-              <a:rPr lang="zh-TW" altLang="en-US" smtClean="0"/>
-              <a:t>16</a:t>
-            </a:fld>
-            <a:endParaRPr lang="zh-TW" altLang="en-US"/>
-          </a:p>
-        </p:txBody>
-      </p:sp>
-    </p:spTree>
-    <p:extLst>
-      <p:ext uri="{BB962C8B-B14F-4D97-AF65-F5344CB8AC3E}">
-        <p14:creationId xmlns:p14="http://schemas.microsoft.com/office/powerpoint/2010/main" val="4262983044"/>
-      </p:ext>
-    </p:extLst>
-  </p:cSld>
-  <p:clrMapOvr>
-    <a:masterClrMapping/>
-  </p:clrMapOvr>
-</p:notes>
-</file>
-
-<file path=ppt/notesSlides/notesSlide17.xml><?xml version="1.0" encoding="utf-8"?>
-<p:notes xmlns:a="http://schemas.openxmlformats.org/drawingml/2006/main" xmlns:r="http://schemas.openxmlformats.org/officeDocument/2006/relationships" xmlns:p="http://schemas.openxmlformats.org/presentationml/2006/main">
-  <p:cSld>
-    <p:spTree>
-      <p:nvGrpSpPr>
-        <p:cNvPr id="1" name=""/>
-        <p:cNvGrpSpPr/>
-        <p:nvPr/>
-      </p:nvGrpSpPr>
-      <p:grpSpPr>
-        <a:xfrm>
-          <a:off x="0" y="0"/>
-          <a:ext cx="0" cy="0"/>
-          <a:chOff x="0" y="0"/>
-          <a:chExt cx="0" cy="0"/>
-        </a:xfrm>
-      </p:grpSpPr>
-      <p:sp>
-        <p:nvSpPr>
-          <p:cNvPr id="2" name="投影片影像版面配置區 1"/>
-          <p:cNvSpPr>
-            <a:spLocks noGrp="1" noRot="1" noChangeAspect="1"/>
-          </p:cNvSpPr>
-          <p:nvPr>
-            <p:ph type="sldImg"/>
-          </p:nvPr>
-        </p:nvSpPr>
-        <p:spPr/>
-      </p:sp>
-      <p:sp>
-        <p:nvSpPr>
-          <p:cNvPr id="3" name="備忘稿版面配置區 2"/>
-          <p:cNvSpPr>
-            <a:spLocks noGrp="1"/>
-          </p:cNvSpPr>
-          <p:nvPr>
-            <p:ph type="body" idx="1"/>
-          </p:nvPr>
-        </p:nvSpPr>
-        <p:spPr/>
-        <p:txBody>
-          <a:bodyPr/>
-          <a:lstStyle/>
-          <a:p>
-            <a:r>
-              <a:rPr lang="en-US" altLang="zh-TW" dirty="0"/>
-              <a:t>1. Controller </a:t>
-            </a:r>
-            <a:r>
-              <a:rPr lang="zh-TW" altLang="en-US" dirty="0"/>
-              <a:t>是 </a:t>
-            </a:r>
-            <a:r>
-              <a:rPr lang="en-US" altLang="zh-TW" dirty="0"/>
-              <a:t>API </a:t>
-            </a:r>
-            <a:r>
-              <a:rPr lang="zh-TW" altLang="en-US" dirty="0"/>
-              <a:t>入口</a:t>
-            </a:r>
-            <a:endParaRPr lang="en-US" altLang="zh-TW" dirty="0"/>
-          </a:p>
-          <a:p>
-            <a:r>
-              <a:rPr lang="en-US" altLang="zh-TW" dirty="0"/>
-              <a:t>2. Controller </a:t>
-            </a:r>
-            <a:r>
-              <a:rPr lang="zh-TW" altLang="en-US" dirty="0"/>
-              <a:t>負責接收前端資料</a:t>
-            </a:r>
-            <a:endParaRPr lang="en-US" altLang="zh-TW" dirty="0"/>
-          </a:p>
-          <a:p>
-            <a:r>
-              <a:rPr lang="en-US" altLang="zh-TW" dirty="0"/>
-              <a:t>3.</a:t>
-            </a:r>
-            <a:r>
-              <a:rPr lang="zh-TW" altLang="en-US" dirty="0"/>
-              <a:t>屬於登入前的規則判斷</a:t>
-            </a:r>
-            <a:endParaRPr lang="en-US" altLang="zh-TW" dirty="0"/>
-          </a:p>
-          <a:p>
-            <a:r>
-              <a:rPr lang="en-US" altLang="zh-TW" dirty="0"/>
-              <a:t>4.</a:t>
-            </a:r>
-            <a:r>
-              <a:rPr lang="zh-TW" altLang="en-US" dirty="0"/>
-              <a:t>屬於資料查詢</a:t>
-            </a:r>
-            <a:endParaRPr lang="en-US" altLang="zh-TW" dirty="0"/>
-          </a:p>
-          <a:p>
-            <a:r>
-              <a:rPr lang="en-US" altLang="zh-TW" dirty="0"/>
-              <a:t>5.</a:t>
-            </a:r>
-            <a:r>
-              <a:rPr lang="zh-TW" altLang="en-US" dirty="0"/>
-              <a:t>屬於登入邏輯</a:t>
-            </a:r>
-            <a:endParaRPr lang="en-US" altLang="zh-TW" dirty="0"/>
-          </a:p>
-          <a:p>
-            <a:r>
-              <a:rPr lang="en-US" altLang="zh-TW" dirty="0"/>
-              <a:t>6.</a:t>
-            </a:r>
-            <a:r>
-              <a:rPr lang="zh-TW" altLang="en-US" dirty="0"/>
-              <a:t>屬於商業邏輯判斷</a:t>
-            </a:r>
-            <a:endParaRPr lang="en-US" altLang="zh-TW" dirty="0"/>
-          </a:p>
-          <a:p>
-            <a:r>
-              <a:rPr lang="en-US" altLang="zh-TW" dirty="0"/>
-              <a:t>7.Controller </a:t>
-            </a:r>
-            <a:r>
-              <a:rPr lang="zh-TW" altLang="en-US" dirty="0"/>
-              <a:t>負責回傳 </a:t>
-            </a:r>
-            <a:r>
-              <a:rPr lang="en-US" altLang="zh-TW" dirty="0"/>
-              <a:t>response</a:t>
-            </a:r>
-            <a:endParaRPr lang="zh-TW" altLang="en-US" dirty="0"/>
-          </a:p>
-        </p:txBody>
-      </p:sp>
-      <p:sp>
-        <p:nvSpPr>
-          <p:cNvPr id="4" name="投影片編號版面配置區 3"/>
-          <p:cNvSpPr>
-            <a:spLocks noGrp="1"/>
-          </p:cNvSpPr>
-          <p:nvPr>
-            <p:ph type="sldNum" sz="quarter" idx="5"/>
-          </p:nvPr>
-        </p:nvSpPr>
-        <p:spPr/>
-        <p:txBody>
-          <a:bodyPr/>
-          <a:lstStyle/>
-          <a:p>
-            <a:fld id="{FC7C28FB-98DF-4E7F-9559-D67F5677BAF3}" type="slidenum">
-              <a:rPr lang="zh-TW" altLang="en-US" smtClean="0"/>
-              <a:t>17</a:t>
-            </a:fld>
-            <a:endParaRPr lang="zh-TW" altLang="en-US"/>
-          </a:p>
-        </p:txBody>
-      </p:sp>
-    </p:spTree>
-    <p:extLst>
-      <p:ext uri="{BB962C8B-B14F-4D97-AF65-F5344CB8AC3E}">
-        <p14:creationId xmlns:p14="http://schemas.microsoft.com/office/powerpoint/2010/main" val="3686518294"/>
-      </p:ext>
-    </p:extLst>
-  </p:cSld>
-  <p:clrMapOvr>
-    <a:masterClrMapping/>
-  </p:clrMapOvr>
-</p:notes>
-</file>
-
-<file path=ppt/notesSlides/notesSlide18.xml><?xml version="1.0" encoding="utf-8"?>
-<p:notes xmlns:a="http://schemas.openxmlformats.org/drawingml/2006/main" xmlns:r="http://schemas.openxmlformats.org/officeDocument/2006/relationships" xmlns:p="http://schemas.openxmlformats.org/presentationml/2006/main">
-  <p:cSld>
-    <p:spTree>
-      <p:nvGrpSpPr>
-        <p:cNvPr id="1" name=""/>
-        <p:cNvGrpSpPr/>
-        <p:nvPr/>
-      </p:nvGrpSpPr>
-      <p:grpSpPr>
-        <a:xfrm>
-          <a:off x="0" y="0"/>
-          <a:ext cx="0" cy="0"/>
-          <a:chOff x="0" y="0"/>
-          <a:chExt cx="0" cy="0"/>
-        </a:xfrm>
-      </p:grpSpPr>
-      <p:sp>
-        <p:nvSpPr>
-          <p:cNvPr id="2" name="投影片影像版面配置區 1"/>
-          <p:cNvSpPr>
-            <a:spLocks noGrp="1" noRot="1" noChangeAspect="1"/>
-          </p:cNvSpPr>
-          <p:nvPr>
-            <p:ph type="sldImg"/>
-          </p:nvPr>
-        </p:nvSpPr>
-        <p:spPr/>
-      </p:sp>
-      <p:sp>
-        <p:nvSpPr>
-          <p:cNvPr id="3" name="備忘稿版面配置區 2"/>
-          <p:cNvSpPr>
-            <a:spLocks noGrp="1"/>
-          </p:cNvSpPr>
-          <p:nvPr>
-            <p:ph type="body" idx="1"/>
-          </p:nvPr>
-        </p:nvSpPr>
-        <p:spPr/>
-        <p:txBody>
-          <a:bodyPr/>
-          <a:lstStyle/>
-          <a:p>
-            <a:endParaRPr lang="zh-TW" altLang="en-US" dirty="0"/>
-          </a:p>
-        </p:txBody>
-      </p:sp>
-      <p:sp>
-        <p:nvSpPr>
-          <p:cNvPr id="4" name="投影片編號版面配置區 3"/>
-          <p:cNvSpPr>
-            <a:spLocks noGrp="1"/>
-          </p:cNvSpPr>
-          <p:nvPr>
-            <p:ph type="sldNum" sz="quarter" idx="5"/>
-          </p:nvPr>
-        </p:nvSpPr>
-        <p:spPr/>
-        <p:txBody>
-          <a:bodyPr/>
-          <a:lstStyle/>
-          <a:p>
-            <a:fld id="{FC7C28FB-98DF-4E7F-9559-D67F5677BAF3}" type="slidenum">
-              <a:rPr lang="zh-TW" altLang="en-US" smtClean="0"/>
-              <a:t>18</a:t>
             </a:fld>
             <a:endParaRPr lang="zh-TW" altLang="en-US"/>
           </a:p>
@@ -2685,7 +2137,7 @@
           <a:p>
             <a:r>
               <a:rPr lang="zh-TW" altLang="en-US" dirty="0"/>
-              <a:t>對前端來說，我們通常看到的是：我送出一個 </a:t>
+              <a:t>對前端來說，通常看到的是：我送出一個 </a:t>
             </a:r>
             <a:r>
               <a:rPr lang="en-US" altLang="zh-TW" dirty="0"/>
@@ -4232,7 +3684,7 @@
           <a:p>
             <a:fld id="{94C5E44A-94B5-43C4-BB6C-4A8F3857A577}" type="datetime1">
               <a:rPr lang="zh-TW" altLang="en-US" smtClean="0"/>
-              <a:t>2026/5/27</a:t>
+              <a:t>2026/5/28</a:t>
             </a:fld>
             <a:endParaRPr lang="zh-TW" altLang="en-US"/>
           </a:p>
@@ -4440,7 +3892,7 @@
           <a:p>
             <a:fld id="{90C300FA-AFC3-4BAC-BDAE-9776C9140ED1}" type="datetime1">
               <a:rPr lang="zh-TW" altLang="en-US" smtClean="0"/>
-              <a:t>2026/5/27</a:t>
+              <a:t>2026/5/28</a:t>
             </a:fld>
             <a:endParaRPr lang="zh-TW" altLang="en-US"/>
           </a:p>
@@ -4696,7 +4148,7 @@
           <a:p>
             <a:fld id="{792C985F-8055-49BF-8CBF-EB3F21728F16}" type="datetime1">
               <a:rPr lang="zh-TW" altLang="en-US" smtClean="0"/>
-              <a:t>2026/5/27</a:t>
+              <a:t>2026/5/28</a:t>
             </a:fld>
             <a:endParaRPr lang="zh-TW" altLang="en-US"/>
           </a:p>
@@ -4870,7 +4322,7 @@
           <a:p>
             <a:fld id="{FF1F1AB7-5BA6-42EC-B258-377FF983CCDC}" type="datetime1">
               <a:rPr lang="zh-TW" altLang="en-US" smtClean="0"/>
-              <a:t>2026/5/27</a:t>
+              <a:t>2026/5/28</a:t>
             </a:fld>
             <a:endParaRPr lang="zh-TW" altLang="en-US"/>
           </a:p>
@@ -5213,7 +4665,7 @@
           <a:p>
             <a:fld id="{F7B50947-74BA-4B86-BBDD-46EB9546B05B}" type="datetime1">
               <a:rPr lang="zh-TW" altLang="en-US" smtClean="0"/>
-              <a:t>2026/5/27</a:t>
+              <a:t>2026/5/28</a:t>
             </a:fld>
             <a:endParaRPr lang="zh-TW" altLang="en-US"/>
           </a:p>
@@ -5488,7 +4940,7 @@
           <a:p>
             <a:fld id="{CF2CF845-7DB9-4882-8BCA-BEBC60C4F1CA}" type="datetime1">
               <a:rPr lang="zh-TW" altLang="en-US" smtClean="0"/>
-              <a:t>2026/5/27</a:t>
+              <a:t>2026/5/28</a:t>
             </a:fld>
             <a:endParaRPr lang="zh-TW" altLang="en-US"/>
           </a:p>
@@ -5867,7 +5319,7 @@
           <a:p>
             <a:fld id="{A7CF5547-D445-4140-B4D8-D417023010DC}" type="datetime1">
               <a:rPr lang="zh-TW" altLang="en-US" smtClean="0"/>
-              <a:t>2026/5/27</a:t>
+              <a:t>2026/5/28</a:t>
             </a:fld>
             <a:endParaRPr lang="zh-TW" altLang="en-US"/>
           </a:p>
@@ -5985,7 +5437,7 @@
           <a:p>
             <a:fld id="{1D4CC906-FAD7-406D-8B41-F05834A6D322}" type="datetime1">
               <a:rPr lang="zh-TW" altLang="en-US" smtClean="0"/>
-              <a:t>2026/5/27</a:t>
+              <a:t>2026/5/28</a:t>
             </a:fld>
             <a:endParaRPr lang="zh-TW" altLang="en-US"/>
           </a:p>
@@ -6156,7 +5608,7 @@
           <a:p>
             <a:fld id="{28F127CE-C26B-4985-A695-176B12DD8B89}" type="datetime1">
               <a:rPr lang="zh-TW" altLang="en-US" smtClean="0"/>
-              <a:t>2026/5/27</a:t>
+              <a:t>2026/5/28</a:t>
             </a:fld>
             <a:endParaRPr lang="zh-TW" altLang="en-US"/>
           </a:p>
@@ -6510,7 +5962,7 @@
           <a:p>
             <a:fld id="{39E4DAFE-EFBD-4BAE-850E-58780F5B136C}" type="datetime1">
               <a:rPr lang="zh-TW" altLang="en-US" smtClean="0"/>
-              <a:t>2026/5/27</a:t>
+              <a:t>2026/5/28</a:t>
             </a:fld>
             <a:endParaRPr lang="zh-TW" altLang="en-US"/>
           </a:p>
@@ -6892,7 +6344,7 @@
           <a:p>
             <a:fld id="{EF8C0808-BD55-469A-BAD8-0715C7D54B5B}" type="datetime1">
               <a:rPr lang="zh-TW" altLang="en-US" smtClean="0"/>
-              <a:t>2026/5/27</a:t>
+              <a:t>2026/5/28</a:t>
             </a:fld>
             <a:endParaRPr lang="zh-TW" altLang="en-US"/>
           </a:p>
@@ -7193,7 +6645,7 @@
           <a:p>
             <a:fld id="{0F6922D4-3686-4F7E-B9A4-F36143A46421}" type="datetime1">
               <a:rPr lang="zh-TW" altLang="en-US" smtClean="0"/>
-              <a:t>2026/5/27</a:t>
+              <a:t>2026/5/28</a:t>
             </a:fld>
             <a:endParaRPr lang="zh-TW" altLang="en-US"/>
           </a:p>
@@ -9630,6 +9082,109 @@
           </a:p>
         </p:txBody>
       </p:sp>
+      <p:pic>
+        <p:nvPicPr>
+          <p:cNvPr id="3" name="Picture 2">
+            <a:extLst>
+              <a:ext uri="{FF2B5EF4-FFF2-40B4-BE49-F238E27FC236}">
+                <a16:creationId xmlns:a16="http://schemas.microsoft.com/office/drawing/2014/main" id="{CA6323D9-2DB8-AD09-5ADC-7AD8534AB1BB}"/>
+              </a:ext>
+            </a:extLst>
+          </p:cNvPr>
+          <p:cNvPicPr>
+            <a:picLocks noChangeAspect="1" noChangeArrowheads="1"/>
+          </p:cNvPicPr>
+          <p:nvPr/>
+        </p:nvPicPr>
+        <p:blipFill>
+          <a:blip r:embed="rId3">
+            <a:extLst>
+              <a:ext uri="{28A0092B-C50C-407E-A947-70E740481C1C}">
+                <a14:useLocalDpi xmlns:a14="http://schemas.microsoft.com/office/drawing/2010/main" val="0"/>
+              </a:ext>
+            </a:extLst>
+          </a:blip>
+          <a:srcRect/>
+          <a:stretch>
+            <a:fillRect/>
+          </a:stretch>
+        </p:blipFill>
+        <p:spPr bwMode="auto">
+          <a:xfrm>
+            <a:off x="535663" y="4806566"/>
+            <a:ext cx="5907578" cy="1328436"/>
+          </a:xfrm>
+          <a:prstGeom prst="rect">
+            <a:avLst/>
+          </a:prstGeom>
+          <a:noFill/>
+          <a:extLst>
+            <a:ext uri="{909E8E84-426E-40DD-AFC4-6F175D3DCCD1}">
+              <a14:hiddenFill xmlns:a14="http://schemas.microsoft.com/office/drawing/2010/main">
+                <a:solidFill>
+                  <a:srgbClr val="FFFFFF"/>
+                </a:solidFill>
+              </a14:hiddenFill>
+            </a:ext>
+          </a:extLst>
+        </p:spPr>
+      </p:pic>
+      <p:sp>
+        <p:nvSpPr>
+          <p:cNvPr id="7" name="矩形 6">
+            <a:extLst>
+              <a:ext uri="{FF2B5EF4-FFF2-40B4-BE49-F238E27FC236}">
+                <a16:creationId xmlns:a16="http://schemas.microsoft.com/office/drawing/2014/main" id="{B715F55B-FD4E-4C9E-4152-5CB6E9CC58FA}"/>
+              </a:ext>
+            </a:extLst>
+          </p:cNvPr>
+          <p:cNvSpPr/>
+          <p:nvPr/>
+        </p:nvSpPr>
+        <p:spPr>
+          <a:xfrm>
+            <a:off x="1749778" y="5054017"/>
+            <a:ext cx="1275644" cy="923421"/>
+          </a:xfrm>
+          <a:prstGeom prst="rect">
+            <a:avLst/>
+          </a:prstGeom>
+          <a:noFill/>
+          <a:ln w="19050">
+            <a:solidFill>
+              <a:srgbClr val="FF0000"/>
+            </a:solidFill>
+          </a:ln>
+        </p:spPr>
+        <p:style>
+          <a:lnRef idx="2">
+            <a:schemeClr val="accent1">
+              <a:shade val="15000"/>
+            </a:schemeClr>
+          </a:lnRef>
+          <a:fillRef idx="1">
+            <a:schemeClr val="accent1"/>
+          </a:fillRef>
+          <a:effectRef idx="0">
+            <a:schemeClr val="accent1"/>
+          </a:effectRef>
+          <a:fontRef idx="minor">
+            <a:schemeClr val="lt1"/>
+          </a:fontRef>
+        </p:style>
+        <p:txBody>
+          <a:bodyPr rtlCol="0" anchor="ctr"/>
+          <a:lstStyle/>
+          <a:p>
+            <a:pPr algn="ctr"/>
+            <a:endParaRPr lang="zh-TW" altLang="en-US">
+              <a:latin typeface="Times New Roman" panose="02020603050405020304" pitchFamily="18" charset="0"/>
+              <a:ea typeface="標楷體" panose="03000509000000000000" pitchFamily="65" charset="-120"/>
+              <a:cs typeface="Times New Roman" panose="02020603050405020304" pitchFamily="18" charset="0"/>
+            </a:endParaRPr>
+          </a:p>
+        </p:txBody>
+      </p:sp>
     </p:spTree>
     <p:extLst>
       <p:ext uri="{BB962C8B-B14F-4D97-AF65-F5344CB8AC3E}">
@@ -9805,7 +9360,7 @@
         </p:nvSpPr>
         <p:spPr>
           <a:xfrm>
-            <a:off x="6107575" y="2360368"/>
+            <a:off x="6443241" y="2344604"/>
             <a:ext cx="5644158" cy="3416320"/>
           </a:xfrm>
           <a:prstGeom prst="rect">
@@ -10626,6 +10181,109 @@
               <a:t>Controller</a:t>
             </a:r>
             <a:endParaRPr lang="en-US" sz="1500" dirty="0">
+              <a:latin typeface="Times New Roman" panose="02020603050405020304" pitchFamily="18" charset="0"/>
+              <a:ea typeface="標楷體" panose="03000509000000000000" pitchFamily="65" charset="-120"/>
+              <a:cs typeface="Times New Roman" panose="02020603050405020304" pitchFamily="18" charset="0"/>
+            </a:endParaRPr>
+          </a:p>
+        </p:txBody>
+      </p:sp>
+      <p:pic>
+        <p:nvPicPr>
+          <p:cNvPr id="3" name="Picture 2">
+            <a:extLst>
+              <a:ext uri="{FF2B5EF4-FFF2-40B4-BE49-F238E27FC236}">
+                <a16:creationId xmlns:a16="http://schemas.microsoft.com/office/drawing/2014/main" id="{DB74D985-E678-B5FB-D1A9-48929F7C8B68}"/>
+              </a:ext>
+            </a:extLst>
+          </p:cNvPr>
+          <p:cNvPicPr>
+            <a:picLocks noChangeAspect="1" noChangeArrowheads="1"/>
+          </p:cNvPicPr>
+          <p:nvPr/>
+        </p:nvPicPr>
+        <p:blipFill>
+          <a:blip r:embed="rId3">
+            <a:extLst>
+              <a:ext uri="{28A0092B-C50C-407E-A947-70E740481C1C}">
+                <a14:useLocalDpi xmlns:a14="http://schemas.microsoft.com/office/drawing/2010/main" val="0"/>
+              </a:ext>
+            </a:extLst>
+          </a:blip>
+          <a:srcRect/>
+          <a:stretch>
+            <a:fillRect/>
+          </a:stretch>
+        </p:blipFill>
+        <p:spPr bwMode="auto">
+          <a:xfrm>
+            <a:off x="535663" y="4806566"/>
+            <a:ext cx="5907578" cy="1328436"/>
+          </a:xfrm>
+          <a:prstGeom prst="rect">
+            <a:avLst/>
+          </a:prstGeom>
+          <a:noFill/>
+          <a:extLst>
+            <a:ext uri="{909E8E84-426E-40DD-AFC4-6F175D3DCCD1}">
+              <a14:hiddenFill xmlns:a14="http://schemas.microsoft.com/office/drawing/2010/main">
+                <a:solidFill>
+                  <a:srgbClr val="FFFFFF"/>
+                </a:solidFill>
+              </a14:hiddenFill>
+            </a:ext>
+          </a:extLst>
+        </p:spPr>
+      </p:pic>
+      <p:sp>
+        <p:nvSpPr>
+          <p:cNvPr id="5" name="矩形 4">
+            <a:extLst>
+              <a:ext uri="{FF2B5EF4-FFF2-40B4-BE49-F238E27FC236}">
+                <a16:creationId xmlns:a16="http://schemas.microsoft.com/office/drawing/2014/main" id="{D5455F51-93B0-90D1-7EC5-62ABA9513AC0}"/>
+              </a:ext>
+            </a:extLst>
+          </p:cNvPr>
+          <p:cNvSpPr/>
+          <p:nvPr/>
+        </p:nvSpPr>
+        <p:spPr>
+          <a:xfrm>
+            <a:off x="3059288" y="5054017"/>
+            <a:ext cx="970845" cy="816205"/>
+          </a:xfrm>
+          <a:prstGeom prst="rect">
+            <a:avLst/>
+          </a:prstGeom>
+          <a:noFill/>
+          <a:ln w="19050">
+            <a:solidFill>
+              <a:srgbClr val="FF0000"/>
+            </a:solidFill>
+          </a:ln>
+        </p:spPr>
+        <p:style>
+          <a:lnRef idx="2">
+            <a:schemeClr val="accent1">
+              <a:shade val="15000"/>
+            </a:schemeClr>
+          </a:lnRef>
+          <a:fillRef idx="1">
+            <a:schemeClr val="accent1"/>
+          </a:fillRef>
+          <a:effectRef idx="0">
+            <a:schemeClr val="accent1"/>
+          </a:effectRef>
+          <a:fontRef idx="minor">
+            <a:schemeClr val="lt1"/>
+          </a:fontRef>
+        </p:style>
+        <p:txBody>
+          <a:bodyPr rtlCol="0" anchor="ctr"/>
+          <a:lstStyle/>
+          <a:p>
+            <a:pPr algn="ctr"/>
+            <a:endParaRPr lang="zh-TW" altLang="en-US">
               <a:latin typeface="Times New Roman" panose="02020603050405020304" pitchFamily="18" charset="0"/>
               <a:ea typeface="標楷體" panose="03000509000000000000" pitchFamily="65" charset="-120"/>
               <a:cs typeface="Times New Roman" panose="02020603050405020304" pitchFamily="18" charset="0"/>
@@ -11055,7 +10713,7 @@
         </p:nvSpPr>
         <p:spPr>
           <a:xfrm>
-            <a:off x="6451707" y="1935470"/>
+            <a:off x="6440418" y="2191239"/>
             <a:ext cx="5420810" cy="2031325"/>
           </a:xfrm>
           <a:prstGeom prst="rect">
@@ -11324,656 +10982,12 @@
           </a:p>
         </p:txBody>
       </p:sp>
-    </p:spTree>
-    <p:extLst>
-      <p:ext uri="{BB962C8B-B14F-4D97-AF65-F5344CB8AC3E}">
-        <p14:creationId xmlns:p14="http://schemas.microsoft.com/office/powerpoint/2010/main" val="900633405"/>
-      </p:ext>
-    </p:extLst>
-  </p:cSld>
-  <p:clrMapOvr>
-    <a:masterClrMapping/>
-  </p:clrMapOvr>
-</p:sld>
-</file>
-
-<file path=ppt/slides/slide14.xml><?xml version="1.0" encoding="utf-8"?>
-<p:sld xmlns:a="http://schemas.openxmlformats.org/drawingml/2006/main" xmlns:r="http://schemas.openxmlformats.org/officeDocument/2006/relationships" xmlns:p="http://schemas.openxmlformats.org/presentationml/2006/main" show="0">
-  <p:cSld>
-    <p:spTree>
-      <p:nvGrpSpPr>
-        <p:cNvPr id="1" name=""/>
-        <p:cNvGrpSpPr/>
-        <p:nvPr/>
-      </p:nvGrpSpPr>
-      <p:grpSpPr>
-        <a:xfrm>
-          <a:off x="0" y="0"/>
-          <a:ext cx="0" cy="0"/>
-          <a:chOff x="0" y="0"/>
-          <a:chExt cx="0" cy="0"/>
-        </a:xfrm>
-      </p:grpSpPr>
-      <p:sp>
-        <p:nvSpPr>
-          <p:cNvPr id="2" name="標題 1">
+      <p:pic>
+        <p:nvPicPr>
+          <p:cNvPr id="7" name="Picture 2">
             <a:extLst>
               <a:ext uri="{FF2B5EF4-FFF2-40B4-BE49-F238E27FC236}">
-                <a16:creationId xmlns:a16="http://schemas.microsoft.com/office/drawing/2014/main" id="{27182EBD-7490-EF5C-09FF-B751264408F3}"/>
-              </a:ext>
-            </a:extLst>
-          </p:cNvPr>
-          <p:cNvSpPr>
-            <a:spLocks noGrp="1"/>
-          </p:cNvSpPr>
-          <p:nvPr>
-            <p:ph type="title"/>
-          </p:nvPr>
-        </p:nvSpPr>
-        <p:spPr/>
-        <p:txBody>
-          <a:bodyPr>
-            <a:normAutofit/>
-          </a:bodyPr>
-          <a:lstStyle/>
-          <a:p>
-            <a:r>
-              <a:rPr lang="zh-TW" altLang="en-US" b="1" i="0" dirty="0">
-                <a:solidFill>
-                  <a:schemeClr val="tx1"/>
-                </a:solidFill>
-                <a:effectLst/>
-                <a:latin typeface="Times New Roman" panose="02020603050405020304" pitchFamily="18" charset="0"/>
-                <a:ea typeface="標楷體" panose="03000509000000000000" pitchFamily="65" charset="-120"/>
-                <a:cs typeface="Times New Roman" panose="02020603050405020304" pitchFamily="18" charset="0"/>
-              </a:rPr>
-              <a:t>範例程式拆解 </a:t>
-            </a:r>
-            <a:r>
-              <a:rPr lang="en-US" altLang="zh-TW" b="1" i="0" dirty="0">
-                <a:solidFill>
-                  <a:schemeClr val="tx1"/>
-                </a:solidFill>
-                <a:effectLst/>
-                <a:latin typeface="Times New Roman" panose="02020603050405020304" pitchFamily="18" charset="0"/>
-                <a:ea typeface="標楷體" panose="03000509000000000000" pitchFamily="65" charset="-120"/>
-                <a:cs typeface="Times New Roman" panose="02020603050405020304" pitchFamily="18" charset="0"/>
-              </a:rPr>
-              <a:t>(</a:t>
-            </a:r>
-            <a:r>
-              <a:rPr lang="zh-TW" altLang="en-US" b="1" i="0" dirty="0">
-                <a:solidFill>
-                  <a:schemeClr val="tx1"/>
-                </a:solidFill>
-                <a:effectLst/>
-                <a:latin typeface="Times New Roman" panose="02020603050405020304" pitchFamily="18" charset="0"/>
-                <a:ea typeface="標楷體" panose="03000509000000000000" pitchFamily="65" charset="-120"/>
-                <a:cs typeface="Times New Roman" panose="02020603050405020304" pitchFamily="18" charset="0"/>
-              </a:rPr>
-              <a:t>一</a:t>
-            </a:r>
-            <a:r>
-              <a:rPr lang="en-US" altLang="zh-TW" b="1" i="0" dirty="0">
-                <a:solidFill>
-                  <a:schemeClr val="tx1"/>
-                </a:solidFill>
-                <a:effectLst/>
-                <a:latin typeface="Times New Roman" panose="02020603050405020304" pitchFamily="18" charset="0"/>
-                <a:ea typeface="標楷體" panose="03000509000000000000" pitchFamily="65" charset="-120"/>
-                <a:cs typeface="Times New Roman" panose="02020603050405020304" pitchFamily="18" charset="0"/>
-              </a:rPr>
-              <a:t>)</a:t>
-            </a:r>
-            <a:br>
-              <a:rPr lang="en-US" altLang="zh-TW" b="1" i="0" dirty="0">
-                <a:solidFill>
-                  <a:schemeClr val="tx1"/>
-                </a:solidFill>
-                <a:effectLst/>
-                <a:latin typeface="Times New Roman" panose="02020603050405020304" pitchFamily="18" charset="0"/>
-                <a:ea typeface="標楷體" panose="03000509000000000000" pitchFamily="65" charset="-120"/>
-                <a:cs typeface="Times New Roman" panose="02020603050405020304" pitchFamily="18" charset="0"/>
-              </a:rPr>
-            </a:br>
-            <a:r>
-              <a:rPr lang="en-US" altLang="zh-TW" sz="2800" b="1" i="0" dirty="0">
-                <a:solidFill>
-                  <a:schemeClr val="tx1"/>
-                </a:solidFill>
-                <a:effectLst/>
-                <a:latin typeface="Times New Roman" panose="02020603050405020304" pitchFamily="18" charset="0"/>
-                <a:ea typeface="標楷體" panose="03000509000000000000" pitchFamily="65" charset="-120"/>
-                <a:cs typeface="Times New Roman" panose="02020603050405020304" pitchFamily="18" charset="0"/>
-              </a:rPr>
-              <a:t>Controller </a:t>
-            </a:r>
-            <a:r>
-              <a:rPr lang="zh-TW" altLang="en-US" sz="2800" b="1" i="0" dirty="0">
-                <a:solidFill>
-                  <a:schemeClr val="tx1"/>
-                </a:solidFill>
-                <a:effectLst/>
-                <a:latin typeface="Times New Roman" panose="02020603050405020304" pitchFamily="18" charset="0"/>
-                <a:ea typeface="標楷體" panose="03000509000000000000" pitchFamily="65" charset="-120"/>
-                <a:cs typeface="Times New Roman" panose="02020603050405020304" pitchFamily="18" charset="0"/>
-              </a:rPr>
-              <a:t>層</a:t>
-            </a:r>
-            <a:r>
-              <a:rPr lang="zh-TW" altLang="en-US" sz="2800" b="0" i="0" dirty="0">
-                <a:solidFill>
-                  <a:schemeClr val="tx1"/>
-                </a:solidFill>
-                <a:effectLst/>
-                <a:latin typeface="Times New Roman" panose="02020603050405020304" pitchFamily="18" charset="0"/>
-                <a:ea typeface="標楷體" panose="03000509000000000000" pitchFamily="65" charset="-120"/>
-                <a:cs typeface="Times New Roman" panose="02020603050405020304" pitchFamily="18" charset="0"/>
-              </a:rPr>
-              <a:t>：設定網址。</a:t>
-            </a:r>
-            <a:endParaRPr lang="zh-TW" altLang="en-US" dirty="0">
-              <a:solidFill>
-                <a:schemeClr val="tx1"/>
-              </a:solidFill>
-              <a:latin typeface="Times New Roman" panose="02020603050405020304" pitchFamily="18" charset="0"/>
-              <a:ea typeface="標楷體" panose="03000509000000000000" pitchFamily="65" charset="-120"/>
-              <a:cs typeface="Times New Roman" panose="02020603050405020304" pitchFamily="18" charset="0"/>
-            </a:endParaRPr>
-          </a:p>
-        </p:txBody>
-      </p:sp>
-      <p:sp>
-        <p:nvSpPr>
-          <p:cNvPr id="3" name="內容版面配置區 2">
-            <a:extLst>
-              <a:ext uri="{FF2B5EF4-FFF2-40B4-BE49-F238E27FC236}">
-                <a16:creationId xmlns:a16="http://schemas.microsoft.com/office/drawing/2014/main" id="{8E1DD6A1-3682-5B39-73DD-C826C29E366B}"/>
-              </a:ext>
-            </a:extLst>
-          </p:cNvPr>
-          <p:cNvSpPr>
-            <a:spLocks noGrp="1"/>
-          </p:cNvSpPr>
-          <p:nvPr>
-            <p:ph idx="1"/>
-          </p:nvPr>
-        </p:nvSpPr>
-        <p:spPr/>
-        <p:txBody>
-          <a:bodyPr>
-            <a:normAutofit fontScale="92500" lnSpcReduction="10000"/>
-          </a:bodyPr>
-          <a:lstStyle/>
-          <a:p>
-            <a:r>
-              <a:rPr lang="en-US" altLang="zh-TW" dirty="0">
-                <a:solidFill>
-                  <a:srgbClr val="FF0000"/>
-                </a:solidFill>
-                <a:latin typeface="Times New Roman" panose="02020603050405020304" pitchFamily="18" charset="0"/>
-                <a:ea typeface="標楷體" panose="03000509000000000000" pitchFamily="65" charset="-120"/>
-                <a:cs typeface="Times New Roman" panose="02020603050405020304" pitchFamily="18" charset="0"/>
-              </a:rPr>
-              <a:t>@RestController</a:t>
-            </a:r>
-          </a:p>
-          <a:p>
-            <a:r>
-              <a:rPr lang="en-US" altLang="zh-TW" dirty="0">
-                <a:solidFill>
-                  <a:srgbClr val="8000FF"/>
-                </a:solidFill>
-                <a:highlight>
-                  <a:srgbClr val="FFFFFF"/>
-                </a:highlight>
-                <a:latin typeface="Times New Roman" panose="02020603050405020304" pitchFamily="18" charset="0"/>
-                <a:ea typeface="標楷體" panose="03000509000000000000" pitchFamily="65" charset="-120"/>
-                <a:cs typeface="Times New Roman" panose="02020603050405020304" pitchFamily="18" charset="0"/>
-              </a:rPr>
-              <a:t>public</a:t>
-            </a:r>
-            <a:r>
-              <a:rPr lang="en-US" altLang="zh-TW" dirty="0">
-                <a:solidFill>
-                  <a:schemeClr val="tx1"/>
-                </a:solidFill>
-                <a:latin typeface="Times New Roman" panose="02020603050405020304" pitchFamily="18" charset="0"/>
-                <a:ea typeface="標楷體" panose="03000509000000000000" pitchFamily="65" charset="-120"/>
-                <a:cs typeface="Times New Roman" panose="02020603050405020304" pitchFamily="18" charset="0"/>
-              </a:rPr>
-              <a:t> </a:t>
-            </a:r>
-            <a:r>
-              <a:rPr lang="en-US" altLang="zh-TW" dirty="0">
-                <a:solidFill>
-                  <a:srgbClr val="7030A0"/>
-                </a:solidFill>
-                <a:latin typeface="Times New Roman" panose="02020603050405020304" pitchFamily="18" charset="0"/>
-                <a:ea typeface="標楷體" panose="03000509000000000000" pitchFamily="65" charset="-120"/>
-                <a:cs typeface="Times New Roman" panose="02020603050405020304" pitchFamily="18" charset="0"/>
-              </a:rPr>
-              <a:t>class</a:t>
-            </a:r>
-            <a:r>
-              <a:rPr lang="en-US" altLang="zh-TW" dirty="0">
-                <a:solidFill>
-                  <a:schemeClr val="tx1"/>
-                </a:solidFill>
-                <a:latin typeface="Times New Roman" panose="02020603050405020304" pitchFamily="18" charset="0"/>
-                <a:ea typeface="標楷體" panose="03000509000000000000" pitchFamily="65" charset="-120"/>
-                <a:cs typeface="Times New Roman" panose="02020603050405020304" pitchFamily="18" charset="0"/>
-              </a:rPr>
-              <a:t> </a:t>
-            </a:r>
-            <a:r>
-              <a:rPr lang="en-US" altLang="zh-TW" dirty="0" err="1">
-                <a:solidFill>
-                  <a:schemeClr val="tx1"/>
-                </a:solidFill>
-                <a:latin typeface="Times New Roman" panose="02020603050405020304" pitchFamily="18" charset="0"/>
-                <a:ea typeface="標楷體" panose="03000509000000000000" pitchFamily="65" charset="-120"/>
-                <a:cs typeface="Times New Roman" panose="02020603050405020304" pitchFamily="18" charset="0"/>
-              </a:rPr>
-              <a:t>GreetController</a:t>
-            </a:r>
-            <a:r>
-              <a:rPr lang="en-US" altLang="zh-TW" dirty="0">
-                <a:solidFill>
-                  <a:schemeClr val="tx1"/>
-                </a:solidFill>
-                <a:latin typeface="Times New Roman" panose="02020603050405020304" pitchFamily="18" charset="0"/>
-                <a:ea typeface="標楷體" panose="03000509000000000000" pitchFamily="65" charset="-120"/>
-                <a:cs typeface="Times New Roman" panose="02020603050405020304" pitchFamily="18" charset="0"/>
-              </a:rPr>
-              <a:t> {</a:t>
-            </a:r>
-          </a:p>
-          <a:p>
-            <a:r>
-              <a:rPr lang="en-US" altLang="zh-TW" dirty="0">
-                <a:solidFill>
-                  <a:schemeClr val="tx1"/>
-                </a:solidFill>
-                <a:latin typeface="Times New Roman" panose="02020603050405020304" pitchFamily="18" charset="0"/>
-                <a:ea typeface="標楷體" panose="03000509000000000000" pitchFamily="65" charset="-120"/>
-                <a:cs typeface="Times New Roman" panose="02020603050405020304" pitchFamily="18" charset="0"/>
-              </a:rPr>
-              <a:t>    </a:t>
-            </a:r>
-            <a:r>
-              <a:rPr lang="en-US" altLang="zh-TW" sz="2000" b="1" dirty="0">
-                <a:solidFill>
-                  <a:srgbClr val="000080"/>
-                </a:solidFill>
-                <a:highlight>
-                  <a:srgbClr val="FFFFFF"/>
-                </a:highlight>
-                <a:latin typeface="Times New Roman" panose="02020603050405020304" pitchFamily="18" charset="0"/>
-                <a:ea typeface="標楷體" panose="03000509000000000000" pitchFamily="65" charset="-120"/>
-                <a:cs typeface="Times New Roman" panose="02020603050405020304" pitchFamily="18" charset="0"/>
-              </a:rPr>
-              <a:t>@Autowired</a:t>
-            </a:r>
-            <a:endParaRPr lang="en-US" altLang="zh-TW" dirty="0">
-              <a:solidFill>
-                <a:schemeClr val="tx1"/>
-              </a:solidFill>
-              <a:latin typeface="Times New Roman" panose="02020603050405020304" pitchFamily="18" charset="0"/>
-              <a:ea typeface="標楷體" panose="03000509000000000000" pitchFamily="65" charset="-120"/>
-              <a:cs typeface="Times New Roman" panose="02020603050405020304" pitchFamily="18" charset="0"/>
-            </a:endParaRPr>
-          </a:p>
-          <a:p>
-            <a:r>
-              <a:rPr lang="en-US" altLang="zh-TW" dirty="0">
-                <a:solidFill>
-                  <a:schemeClr val="tx1"/>
-                </a:solidFill>
-                <a:latin typeface="Times New Roman" panose="02020603050405020304" pitchFamily="18" charset="0"/>
-                <a:ea typeface="標楷體" panose="03000509000000000000" pitchFamily="65" charset="-120"/>
-                <a:cs typeface="Times New Roman" panose="02020603050405020304" pitchFamily="18" charset="0"/>
-              </a:rPr>
-              <a:t>    </a:t>
-            </a:r>
-            <a:r>
-              <a:rPr lang="en-US" altLang="zh-TW" dirty="0">
-                <a:solidFill>
-                  <a:srgbClr val="7030A0"/>
-                </a:solidFill>
-                <a:latin typeface="Times New Roman" panose="02020603050405020304" pitchFamily="18" charset="0"/>
-                <a:ea typeface="標楷體" panose="03000509000000000000" pitchFamily="65" charset="-120"/>
-                <a:cs typeface="Times New Roman" panose="02020603050405020304" pitchFamily="18" charset="0"/>
-              </a:rPr>
-              <a:t>private</a:t>
-            </a:r>
-            <a:r>
-              <a:rPr lang="en-US" altLang="zh-TW" dirty="0">
-                <a:solidFill>
-                  <a:schemeClr val="tx1"/>
-                </a:solidFill>
-                <a:latin typeface="Times New Roman" panose="02020603050405020304" pitchFamily="18" charset="0"/>
-                <a:ea typeface="標楷體" panose="03000509000000000000" pitchFamily="65" charset="-120"/>
-                <a:cs typeface="Times New Roman" panose="02020603050405020304" pitchFamily="18" charset="0"/>
-              </a:rPr>
-              <a:t> </a:t>
-            </a:r>
-            <a:r>
-              <a:rPr lang="en-US" altLang="zh-TW" dirty="0" err="1">
-                <a:solidFill>
-                  <a:schemeClr val="tx1"/>
-                </a:solidFill>
-                <a:latin typeface="Times New Roman" panose="02020603050405020304" pitchFamily="18" charset="0"/>
-                <a:ea typeface="標楷體" panose="03000509000000000000" pitchFamily="65" charset="-120"/>
-                <a:cs typeface="Times New Roman" panose="02020603050405020304" pitchFamily="18" charset="0"/>
-              </a:rPr>
-              <a:t>GreetService</a:t>
-            </a:r>
-            <a:r>
-              <a:rPr lang="en-US" altLang="zh-TW" dirty="0">
-                <a:solidFill>
-                  <a:schemeClr val="tx1"/>
-                </a:solidFill>
-                <a:latin typeface="Times New Roman" panose="02020603050405020304" pitchFamily="18" charset="0"/>
-                <a:ea typeface="標楷體" panose="03000509000000000000" pitchFamily="65" charset="-120"/>
-                <a:cs typeface="Times New Roman" panose="02020603050405020304" pitchFamily="18" charset="0"/>
-              </a:rPr>
-              <a:t> </a:t>
-            </a:r>
-            <a:r>
-              <a:rPr lang="en-US" altLang="zh-TW" dirty="0" err="1">
-                <a:solidFill>
-                  <a:schemeClr val="tx1"/>
-                </a:solidFill>
-                <a:latin typeface="Times New Roman" panose="02020603050405020304" pitchFamily="18" charset="0"/>
-                <a:ea typeface="標楷體" panose="03000509000000000000" pitchFamily="65" charset="-120"/>
-                <a:cs typeface="Times New Roman" panose="02020603050405020304" pitchFamily="18" charset="0"/>
-              </a:rPr>
-              <a:t>greetService</a:t>
-            </a:r>
-            <a:r>
-              <a:rPr lang="en-US" altLang="zh-TW" dirty="0">
-                <a:solidFill>
-                  <a:schemeClr val="tx1"/>
-                </a:solidFill>
-                <a:latin typeface="Times New Roman" panose="02020603050405020304" pitchFamily="18" charset="0"/>
-                <a:ea typeface="標楷體" panose="03000509000000000000" pitchFamily="65" charset="-120"/>
-                <a:cs typeface="Times New Roman" panose="02020603050405020304" pitchFamily="18" charset="0"/>
-              </a:rPr>
-              <a:t>; </a:t>
-            </a:r>
-            <a:endParaRPr lang="zh-TW" altLang="en-US" dirty="0">
-              <a:solidFill>
-                <a:schemeClr val="tx1"/>
-              </a:solidFill>
-              <a:latin typeface="Times New Roman" panose="02020603050405020304" pitchFamily="18" charset="0"/>
-              <a:ea typeface="標楷體" panose="03000509000000000000" pitchFamily="65" charset="-120"/>
-              <a:cs typeface="Times New Roman" panose="02020603050405020304" pitchFamily="18" charset="0"/>
-            </a:endParaRPr>
-          </a:p>
-          <a:p>
-            <a:pPr marL="0" indent="0">
-              <a:buNone/>
-            </a:pPr>
-            <a:endParaRPr lang="zh-TW" altLang="en-US" dirty="0">
-              <a:solidFill>
-                <a:schemeClr val="tx1"/>
-              </a:solidFill>
-              <a:latin typeface="Times New Roman" panose="02020603050405020304" pitchFamily="18" charset="0"/>
-              <a:ea typeface="標楷體" panose="03000509000000000000" pitchFamily="65" charset="-120"/>
-              <a:cs typeface="Times New Roman" panose="02020603050405020304" pitchFamily="18" charset="0"/>
-            </a:endParaRPr>
-          </a:p>
-          <a:p>
-            <a:r>
-              <a:rPr lang="zh-TW" altLang="en-US" dirty="0">
-                <a:solidFill>
-                  <a:schemeClr val="tx1"/>
-                </a:solidFill>
-                <a:latin typeface="Times New Roman" panose="02020603050405020304" pitchFamily="18" charset="0"/>
-                <a:ea typeface="標楷體" panose="03000509000000000000" pitchFamily="65" charset="-120"/>
-                <a:cs typeface="Times New Roman" panose="02020603050405020304" pitchFamily="18" charset="0"/>
-              </a:rPr>
-              <a:t>    </a:t>
-            </a:r>
-            <a:r>
-              <a:rPr lang="en-US" altLang="zh-TW" dirty="0">
-                <a:solidFill>
-                  <a:schemeClr val="tx1"/>
-                </a:solidFill>
-                <a:latin typeface="Times New Roman" panose="02020603050405020304" pitchFamily="18" charset="0"/>
-                <a:ea typeface="標楷體" panose="03000509000000000000" pitchFamily="65" charset="-120"/>
-                <a:cs typeface="Times New Roman" panose="02020603050405020304" pitchFamily="18" charset="0"/>
-              </a:rPr>
-              <a:t>@GetMapping</a:t>
-            </a:r>
-            <a:r>
-              <a:rPr lang="en-US" altLang="zh-TW" dirty="0">
-                <a:solidFill>
-                  <a:srgbClr val="00B050"/>
-                </a:solidFill>
-                <a:latin typeface="Times New Roman" panose="02020603050405020304" pitchFamily="18" charset="0"/>
-                <a:ea typeface="標楷體" panose="03000509000000000000" pitchFamily="65" charset="-120"/>
-                <a:cs typeface="Times New Roman" panose="02020603050405020304" pitchFamily="18" charset="0"/>
-              </a:rPr>
-              <a:t>("/hello"</a:t>
-            </a:r>
-            <a:r>
-              <a:rPr lang="en-US" altLang="zh-TW" dirty="0">
-                <a:solidFill>
-                  <a:schemeClr val="tx1"/>
-                </a:solidFill>
-                <a:latin typeface="Times New Roman" panose="02020603050405020304" pitchFamily="18" charset="0"/>
-                <a:ea typeface="標楷體" panose="03000509000000000000" pitchFamily="65" charset="-120"/>
-                <a:cs typeface="Times New Roman" panose="02020603050405020304" pitchFamily="18" charset="0"/>
-              </a:rPr>
-              <a:t>)</a:t>
-            </a:r>
-          </a:p>
-          <a:p>
-            <a:r>
-              <a:rPr lang="en-US" altLang="zh-TW" dirty="0">
-                <a:solidFill>
-                  <a:schemeClr val="tx1"/>
-                </a:solidFill>
-                <a:latin typeface="Times New Roman" panose="02020603050405020304" pitchFamily="18" charset="0"/>
-                <a:ea typeface="標楷體" panose="03000509000000000000" pitchFamily="65" charset="-120"/>
-                <a:cs typeface="Times New Roman" panose="02020603050405020304" pitchFamily="18" charset="0"/>
-              </a:rPr>
-              <a:t>    </a:t>
-            </a:r>
-            <a:r>
-              <a:rPr lang="en-US" altLang="zh-TW" dirty="0">
-                <a:solidFill>
-                  <a:srgbClr val="7030A0"/>
-                </a:solidFill>
-                <a:latin typeface="Times New Roman" panose="02020603050405020304" pitchFamily="18" charset="0"/>
-                <a:ea typeface="標楷體" panose="03000509000000000000" pitchFamily="65" charset="-120"/>
-                <a:cs typeface="Times New Roman" panose="02020603050405020304" pitchFamily="18" charset="0"/>
-              </a:rPr>
-              <a:t>public</a:t>
-            </a:r>
-            <a:r>
-              <a:rPr lang="en-US" altLang="zh-TW" dirty="0">
-                <a:solidFill>
-                  <a:schemeClr val="tx1"/>
-                </a:solidFill>
-                <a:latin typeface="Times New Roman" panose="02020603050405020304" pitchFamily="18" charset="0"/>
-                <a:ea typeface="標楷體" panose="03000509000000000000" pitchFamily="65" charset="-120"/>
-                <a:cs typeface="Times New Roman" panose="02020603050405020304" pitchFamily="18" charset="0"/>
-              </a:rPr>
-              <a:t> </a:t>
-            </a:r>
-            <a:r>
-              <a:rPr lang="en-US" altLang="zh-TW" dirty="0">
-                <a:solidFill>
-                  <a:srgbClr val="7030A0"/>
-                </a:solidFill>
-                <a:latin typeface="Times New Roman" panose="02020603050405020304" pitchFamily="18" charset="0"/>
-                <a:ea typeface="標楷體" panose="03000509000000000000" pitchFamily="65" charset="-120"/>
-                <a:cs typeface="Times New Roman" panose="02020603050405020304" pitchFamily="18" charset="0"/>
-              </a:rPr>
-              <a:t>String</a:t>
-            </a:r>
-            <a:r>
-              <a:rPr lang="en-US" altLang="zh-TW" dirty="0">
-                <a:solidFill>
-                  <a:schemeClr val="tx1"/>
-                </a:solidFill>
-                <a:latin typeface="Times New Roman" panose="02020603050405020304" pitchFamily="18" charset="0"/>
-                <a:ea typeface="標楷體" panose="03000509000000000000" pitchFamily="65" charset="-120"/>
-                <a:cs typeface="Times New Roman" panose="02020603050405020304" pitchFamily="18" charset="0"/>
-              </a:rPr>
-              <a:t> </a:t>
-            </a:r>
-            <a:r>
-              <a:rPr lang="en-US" altLang="zh-TW" dirty="0" err="1">
-                <a:solidFill>
-                  <a:schemeClr val="tx1"/>
-                </a:solidFill>
-                <a:latin typeface="Times New Roman" panose="02020603050405020304" pitchFamily="18" charset="0"/>
-                <a:ea typeface="標楷體" panose="03000509000000000000" pitchFamily="65" charset="-120"/>
-                <a:cs typeface="Times New Roman" panose="02020603050405020304" pitchFamily="18" charset="0"/>
-              </a:rPr>
-              <a:t>sayHello</a:t>
-            </a:r>
-            <a:r>
-              <a:rPr lang="en-US" altLang="zh-TW" dirty="0">
-                <a:solidFill>
-                  <a:schemeClr val="tx1"/>
-                </a:solidFill>
-                <a:latin typeface="Times New Roman" panose="02020603050405020304" pitchFamily="18" charset="0"/>
-                <a:ea typeface="標楷體" panose="03000509000000000000" pitchFamily="65" charset="-120"/>
-                <a:cs typeface="Times New Roman" panose="02020603050405020304" pitchFamily="18" charset="0"/>
-              </a:rPr>
-              <a:t>() {</a:t>
-            </a:r>
-          </a:p>
-          <a:p>
-            <a:r>
-              <a:rPr lang="en-US" altLang="zh-TW" dirty="0">
-                <a:solidFill>
-                  <a:schemeClr val="tx1"/>
-                </a:solidFill>
-                <a:latin typeface="Times New Roman" panose="02020603050405020304" pitchFamily="18" charset="0"/>
-                <a:ea typeface="標楷體" panose="03000509000000000000" pitchFamily="65" charset="-120"/>
-                <a:cs typeface="Times New Roman" panose="02020603050405020304" pitchFamily="18" charset="0"/>
-              </a:rPr>
-              <a:t>        return </a:t>
-            </a:r>
-            <a:r>
-              <a:rPr lang="en-US" altLang="zh-TW" dirty="0" err="1">
-                <a:solidFill>
-                  <a:schemeClr val="tx1"/>
-                </a:solidFill>
-                <a:latin typeface="Times New Roman" panose="02020603050405020304" pitchFamily="18" charset="0"/>
-                <a:ea typeface="標楷體" panose="03000509000000000000" pitchFamily="65" charset="-120"/>
-                <a:cs typeface="Times New Roman" panose="02020603050405020304" pitchFamily="18" charset="0"/>
-              </a:rPr>
-              <a:t>greetService.makeGreeting</a:t>
-            </a:r>
-            <a:r>
-              <a:rPr lang="en-US" altLang="zh-TW" dirty="0">
-                <a:solidFill>
-                  <a:schemeClr val="tx1"/>
-                </a:solidFill>
-                <a:latin typeface="Times New Roman" panose="02020603050405020304" pitchFamily="18" charset="0"/>
-                <a:ea typeface="標楷體" panose="03000509000000000000" pitchFamily="65" charset="-120"/>
-                <a:cs typeface="Times New Roman" panose="02020603050405020304" pitchFamily="18" charset="0"/>
-              </a:rPr>
-              <a:t>();</a:t>
-            </a:r>
-            <a:endParaRPr lang="zh-TW" altLang="en-US" dirty="0">
-              <a:solidFill>
-                <a:schemeClr val="tx1"/>
-              </a:solidFill>
-              <a:latin typeface="Times New Roman" panose="02020603050405020304" pitchFamily="18" charset="0"/>
-              <a:ea typeface="標楷體" panose="03000509000000000000" pitchFamily="65" charset="-120"/>
-              <a:cs typeface="Times New Roman" panose="02020603050405020304" pitchFamily="18" charset="0"/>
-            </a:endParaRPr>
-          </a:p>
-          <a:p>
-            <a:r>
-              <a:rPr lang="zh-TW" altLang="en-US" dirty="0">
-                <a:solidFill>
-                  <a:schemeClr val="tx1"/>
-                </a:solidFill>
-                <a:latin typeface="Times New Roman" panose="02020603050405020304" pitchFamily="18" charset="0"/>
-                <a:ea typeface="標楷體" panose="03000509000000000000" pitchFamily="65" charset="-120"/>
-                <a:cs typeface="Times New Roman" panose="02020603050405020304" pitchFamily="18" charset="0"/>
-              </a:rPr>
-              <a:t>    </a:t>
-            </a:r>
-            <a:r>
-              <a:rPr lang="en-US" altLang="zh-TW" dirty="0">
-                <a:solidFill>
-                  <a:schemeClr val="tx1"/>
-                </a:solidFill>
-                <a:latin typeface="Times New Roman" panose="02020603050405020304" pitchFamily="18" charset="0"/>
-                <a:ea typeface="標楷體" panose="03000509000000000000" pitchFamily="65" charset="-120"/>
-                <a:cs typeface="Times New Roman" panose="02020603050405020304" pitchFamily="18" charset="0"/>
-              </a:rPr>
-              <a:t>}</a:t>
-            </a:r>
-          </a:p>
-          <a:p>
-            <a:r>
-              <a:rPr lang="en-US" altLang="zh-TW" dirty="0">
-                <a:solidFill>
-                  <a:schemeClr val="tx1"/>
-                </a:solidFill>
-                <a:latin typeface="Times New Roman" panose="02020603050405020304" pitchFamily="18" charset="0"/>
-                <a:ea typeface="標楷體" panose="03000509000000000000" pitchFamily="65" charset="-120"/>
-                <a:cs typeface="Times New Roman" panose="02020603050405020304" pitchFamily="18" charset="0"/>
-              </a:rPr>
-              <a:t>}</a:t>
-            </a:r>
-            <a:endParaRPr lang="zh-TW" altLang="en-US" dirty="0">
-              <a:solidFill>
-                <a:schemeClr val="tx1"/>
-              </a:solidFill>
-              <a:latin typeface="Times New Roman" panose="02020603050405020304" pitchFamily="18" charset="0"/>
-              <a:ea typeface="標楷體" panose="03000509000000000000" pitchFamily="65" charset="-120"/>
-              <a:cs typeface="Times New Roman" panose="02020603050405020304" pitchFamily="18" charset="0"/>
-            </a:endParaRPr>
-          </a:p>
-        </p:txBody>
-      </p:sp>
-      <p:sp>
-        <p:nvSpPr>
-          <p:cNvPr id="4" name="投影片編號版面配置區 3">
-            <a:extLst>
-              <a:ext uri="{FF2B5EF4-FFF2-40B4-BE49-F238E27FC236}">
-                <a16:creationId xmlns:a16="http://schemas.microsoft.com/office/drawing/2014/main" id="{29258E98-BA89-A0B5-87FE-2799D5298343}"/>
-              </a:ext>
-            </a:extLst>
-          </p:cNvPr>
-          <p:cNvSpPr>
-            <a:spLocks noGrp="1"/>
-          </p:cNvSpPr>
-          <p:nvPr>
-            <p:ph type="sldNum" sz="quarter" idx="12"/>
-          </p:nvPr>
-        </p:nvSpPr>
-        <p:spPr/>
-        <p:txBody>
-          <a:bodyPr/>
-          <a:lstStyle/>
-          <a:p>
-            <a:fld id="{87D5BEE6-8A42-470F-9B73-3A0C6CCA84ED}" type="slidenum">
-              <a:rPr lang="zh-TW" altLang="en-US" smtClean="0"/>
-              <a:t>14</a:t>
-            </a:fld>
-            <a:endParaRPr lang="zh-TW" altLang="en-US"/>
-          </a:p>
-        </p:txBody>
-      </p:sp>
-      <p:pic>
-        <p:nvPicPr>
-          <p:cNvPr id="3074" name="Picture 2">
-            <a:extLst>
-              <a:ext uri="{FF2B5EF4-FFF2-40B4-BE49-F238E27FC236}">
-                <a16:creationId xmlns:a16="http://schemas.microsoft.com/office/drawing/2014/main" id="{3849E4CB-4E15-4357-9CDC-19ECC8458F8A}"/>
+                <a16:creationId xmlns:a16="http://schemas.microsoft.com/office/drawing/2014/main" id="{1CA3E892-9ECF-DBBB-8DD3-1CEDC19B4EA5}"/>
               </a:ext>
             </a:extLst>
           </p:cNvPr>
@@ -11997,7 +11011,7 @@
         </p:blipFill>
         <p:spPr bwMode="auto">
           <a:xfrm>
-            <a:off x="6096000" y="2955188"/>
+            <a:off x="535663" y="4806566"/>
             <a:ext cx="5907578" cy="1328436"/>
           </a:xfrm>
           <a:prstGeom prst="rect">
@@ -12017,10 +11031,10 @@
       </p:pic>
       <p:sp>
         <p:nvSpPr>
-          <p:cNvPr id="5" name="矩形 4">
+          <p:cNvPr id="9" name="矩形 8">
             <a:extLst>
               <a:ext uri="{FF2B5EF4-FFF2-40B4-BE49-F238E27FC236}">
-                <a16:creationId xmlns:a16="http://schemas.microsoft.com/office/drawing/2014/main" id="{A2488499-8149-5445-120D-C44745BAD58C}"/>
+                <a16:creationId xmlns:a16="http://schemas.microsoft.com/office/drawing/2014/main" id="{85A0B4AA-6F30-B7B1-D192-7C5800016D76}"/>
               </a:ext>
             </a:extLst>
           </p:cNvPr>
@@ -12029,14 +11043,14 @@
         </p:nvSpPr>
         <p:spPr>
           <a:xfrm>
-            <a:off x="7331825" y="3075709"/>
-            <a:ext cx="2344190" cy="1047404"/>
+            <a:off x="4267201" y="5054017"/>
+            <a:ext cx="970845" cy="816205"/>
           </a:xfrm>
           <a:prstGeom prst="rect">
             <a:avLst/>
           </a:prstGeom>
           <a:noFill/>
-          <a:ln w="57150">
+          <a:ln w="19050">
             <a:solidFill>
               <a:srgbClr val="FF0000"/>
             </a:solidFill>
@@ -12063,14 +11077,18 @@
           <a:lstStyle/>
           <a:p>
             <a:pPr algn="ctr"/>
-            <a:endParaRPr lang="zh-TW" altLang="en-US"/>
+            <a:endParaRPr lang="zh-TW" altLang="en-US">
+              <a:latin typeface="Times New Roman" panose="02020603050405020304" pitchFamily="18" charset="0"/>
+              <a:ea typeface="標楷體" panose="03000509000000000000" pitchFamily="65" charset="-120"/>
+              <a:cs typeface="Times New Roman" panose="02020603050405020304" pitchFamily="18" charset="0"/>
+            </a:endParaRPr>
           </a:p>
         </p:txBody>
       </p:sp>
     </p:spTree>
     <p:extLst>
       <p:ext uri="{BB962C8B-B14F-4D97-AF65-F5344CB8AC3E}">
-        <p14:creationId xmlns:p14="http://schemas.microsoft.com/office/powerpoint/2010/main" val="3160271271"/>
+        <p14:creationId xmlns:p14="http://schemas.microsoft.com/office/powerpoint/2010/main" val="900633405"/>
       </p:ext>
     </p:extLst>
   </p:cSld>
@@ -12080,1115 +11098,7 @@
 </p:sld>
 </file>
 
-<file path=ppt/slides/slide15.xml><?xml version="1.0" encoding="utf-8"?>
-<p:sld xmlns:a="http://schemas.openxmlformats.org/drawingml/2006/main" xmlns:r="http://schemas.openxmlformats.org/officeDocument/2006/relationships" xmlns:p="http://schemas.openxmlformats.org/presentationml/2006/main" show="0">
-  <p:cSld>
-    <p:spTree>
-      <p:nvGrpSpPr>
-        <p:cNvPr id="1" name=""/>
-        <p:cNvGrpSpPr/>
-        <p:nvPr/>
-      </p:nvGrpSpPr>
-      <p:grpSpPr>
-        <a:xfrm>
-          <a:off x="0" y="0"/>
-          <a:ext cx="0" cy="0"/>
-          <a:chOff x="0" y="0"/>
-          <a:chExt cx="0" cy="0"/>
-        </a:xfrm>
-      </p:grpSpPr>
-      <p:sp>
-        <p:nvSpPr>
-          <p:cNvPr id="2" name="標題 1">
-            <a:extLst>
-              <a:ext uri="{FF2B5EF4-FFF2-40B4-BE49-F238E27FC236}">
-                <a16:creationId xmlns:a16="http://schemas.microsoft.com/office/drawing/2014/main" id="{27182EBD-7490-EF5C-09FF-B751264408F3}"/>
-              </a:ext>
-            </a:extLst>
-          </p:cNvPr>
-          <p:cNvSpPr>
-            <a:spLocks noGrp="1"/>
-          </p:cNvSpPr>
-          <p:nvPr>
-            <p:ph type="title"/>
-          </p:nvPr>
-        </p:nvSpPr>
-        <p:spPr/>
-        <p:txBody>
-          <a:bodyPr>
-            <a:normAutofit/>
-          </a:bodyPr>
-          <a:lstStyle/>
-          <a:p>
-            <a:r>
-              <a:rPr lang="zh-TW" altLang="en-US" b="1" i="0" dirty="0">
-                <a:solidFill>
-                  <a:schemeClr val="tx1"/>
-                </a:solidFill>
-                <a:effectLst/>
-                <a:latin typeface="Times New Roman" panose="02020603050405020304" pitchFamily="18" charset="0"/>
-                <a:ea typeface="標楷體" panose="03000509000000000000" pitchFamily="65" charset="-120"/>
-                <a:cs typeface="Times New Roman" panose="02020603050405020304" pitchFamily="18" charset="0"/>
-              </a:rPr>
-              <a:t>範例程式拆解 </a:t>
-            </a:r>
-            <a:r>
-              <a:rPr lang="en-US" altLang="zh-TW" b="1" i="0" dirty="0">
-                <a:solidFill>
-                  <a:schemeClr val="tx1"/>
-                </a:solidFill>
-                <a:effectLst/>
-                <a:latin typeface="Times New Roman" panose="02020603050405020304" pitchFamily="18" charset="0"/>
-                <a:ea typeface="標楷體" panose="03000509000000000000" pitchFamily="65" charset="-120"/>
-                <a:cs typeface="Times New Roman" panose="02020603050405020304" pitchFamily="18" charset="0"/>
-              </a:rPr>
-              <a:t>(</a:t>
-            </a:r>
-            <a:r>
-              <a:rPr lang="zh-TW" altLang="en-US" b="1" dirty="0">
-                <a:solidFill>
-                  <a:schemeClr val="tx1"/>
-                </a:solidFill>
-                <a:latin typeface="Times New Roman" panose="02020603050405020304" pitchFamily="18" charset="0"/>
-                <a:ea typeface="標楷體" panose="03000509000000000000" pitchFamily="65" charset="-120"/>
-                <a:cs typeface="Times New Roman" panose="02020603050405020304" pitchFamily="18" charset="0"/>
-              </a:rPr>
-              <a:t>二</a:t>
-            </a:r>
-            <a:r>
-              <a:rPr lang="en-US" altLang="zh-TW" b="1" i="0" dirty="0">
-                <a:solidFill>
-                  <a:schemeClr val="tx1"/>
-                </a:solidFill>
-                <a:effectLst/>
-                <a:latin typeface="Times New Roman" panose="02020603050405020304" pitchFamily="18" charset="0"/>
-                <a:ea typeface="標楷體" panose="03000509000000000000" pitchFamily="65" charset="-120"/>
-                <a:cs typeface="Times New Roman" panose="02020603050405020304" pitchFamily="18" charset="0"/>
-              </a:rPr>
-              <a:t>)</a:t>
-            </a:r>
-            <a:r>
-              <a:rPr lang="en-US" altLang="zh-TW" sz="4800" b="1" i="0" dirty="0">
-                <a:solidFill>
-                  <a:schemeClr val="tx1"/>
-                </a:solidFill>
-                <a:effectLst/>
-                <a:latin typeface="Times New Roman" panose="02020603050405020304" pitchFamily="18" charset="0"/>
-                <a:ea typeface="標楷體" panose="03000509000000000000" pitchFamily="65" charset="-120"/>
-                <a:cs typeface="Times New Roman" panose="02020603050405020304" pitchFamily="18" charset="0"/>
-              </a:rPr>
-              <a:t> </a:t>
-            </a:r>
-            <a:br>
-              <a:rPr lang="en-US" altLang="zh-TW" sz="4800" b="1" i="0" dirty="0">
-                <a:solidFill>
-                  <a:schemeClr val="tx1"/>
-                </a:solidFill>
-                <a:effectLst/>
-                <a:latin typeface="Times New Roman" panose="02020603050405020304" pitchFamily="18" charset="0"/>
-                <a:ea typeface="標楷體" panose="03000509000000000000" pitchFamily="65" charset="-120"/>
-                <a:cs typeface="Times New Roman" panose="02020603050405020304" pitchFamily="18" charset="0"/>
-              </a:rPr>
-            </a:br>
-            <a:r>
-              <a:rPr lang="en-US" altLang="zh-TW" sz="2800" b="1" i="0" dirty="0">
-                <a:solidFill>
-                  <a:schemeClr val="tx1"/>
-                </a:solidFill>
-                <a:effectLst/>
-                <a:latin typeface="Times New Roman" panose="02020603050405020304" pitchFamily="18" charset="0"/>
-                <a:ea typeface="標楷體" panose="03000509000000000000" pitchFamily="65" charset="-120"/>
-                <a:cs typeface="Times New Roman" panose="02020603050405020304" pitchFamily="18" charset="0"/>
-              </a:rPr>
-              <a:t>Service </a:t>
-            </a:r>
-            <a:r>
-              <a:rPr lang="zh-TW" altLang="en-US" sz="2800" b="1" i="0" dirty="0">
-                <a:solidFill>
-                  <a:schemeClr val="tx1"/>
-                </a:solidFill>
-                <a:effectLst/>
-                <a:latin typeface="Times New Roman" panose="02020603050405020304" pitchFamily="18" charset="0"/>
-                <a:ea typeface="標楷體" panose="03000509000000000000" pitchFamily="65" charset="-120"/>
-                <a:cs typeface="Times New Roman" panose="02020603050405020304" pitchFamily="18" charset="0"/>
-              </a:rPr>
-              <a:t>層</a:t>
-            </a:r>
-            <a:r>
-              <a:rPr lang="zh-TW" altLang="en-US" sz="2800" b="0" i="0" dirty="0">
-                <a:solidFill>
-                  <a:schemeClr val="tx1"/>
-                </a:solidFill>
-                <a:effectLst/>
-                <a:latin typeface="Times New Roman" panose="02020603050405020304" pitchFamily="18" charset="0"/>
-                <a:ea typeface="標楷體" panose="03000509000000000000" pitchFamily="65" charset="-120"/>
-                <a:cs typeface="Times New Roman" panose="02020603050405020304" pitchFamily="18" charset="0"/>
-              </a:rPr>
-              <a:t>：把名字加工，加上問候語。</a:t>
-            </a:r>
-            <a:endParaRPr lang="zh-TW" altLang="en-US" dirty="0">
-              <a:solidFill>
-                <a:schemeClr val="tx1"/>
-              </a:solidFill>
-              <a:latin typeface="Times New Roman" panose="02020603050405020304" pitchFamily="18" charset="0"/>
-              <a:ea typeface="標楷體" panose="03000509000000000000" pitchFamily="65" charset="-120"/>
-              <a:cs typeface="Times New Roman" panose="02020603050405020304" pitchFamily="18" charset="0"/>
-            </a:endParaRPr>
-          </a:p>
-        </p:txBody>
-      </p:sp>
-      <p:sp>
-        <p:nvSpPr>
-          <p:cNvPr id="3" name="內容版面配置區 2">
-            <a:extLst>
-              <a:ext uri="{FF2B5EF4-FFF2-40B4-BE49-F238E27FC236}">
-                <a16:creationId xmlns:a16="http://schemas.microsoft.com/office/drawing/2014/main" id="{8E1DD6A1-3682-5B39-73DD-C826C29E366B}"/>
-              </a:ext>
-            </a:extLst>
-          </p:cNvPr>
-          <p:cNvSpPr>
-            <a:spLocks noGrp="1"/>
-          </p:cNvSpPr>
-          <p:nvPr>
-            <p:ph idx="1"/>
-          </p:nvPr>
-        </p:nvSpPr>
-        <p:spPr/>
-        <p:txBody>
-          <a:bodyPr>
-            <a:normAutofit fontScale="92500" lnSpcReduction="10000"/>
-          </a:bodyPr>
-          <a:lstStyle/>
-          <a:p>
-            <a:r>
-              <a:rPr lang="en-US" altLang="zh-TW" dirty="0">
-                <a:solidFill>
-                  <a:srgbClr val="FF0000"/>
-                </a:solidFill>
-                <a:latin typeface="Times New Roman" panose="02020603050405020304" pitchFamily="18" charset="0"/>
-                <a:ea typeface="標楷體" panose="03000509000000000000" pitchFamily="65" charset="-120"/>
-                <a:cs typeface="Times New Roman" panose="02020603050405020304" pitchFamily="18" charset="0"/>
-              </a:rPr>
-              <a:t>@Service</a:t>
-            </a:r>
-          </a:p>
-          <a:p>
-            <a:r>
-              <a:rPr lang="en-US" altLang="zh-TW" dirty="0">
-                <a:solidFill>
-                  <a:srgbClr val="7030A0"/>
-                </a:solidFill>
-                <a:latin typeface="Times New Roman" panose="02020603050405020304" pitchFamily="18" charset="0"/>
-                <a:ea typeface="標楷體" panose="03000509000000000000" pitchFamily="65" charset="-120"/>
-                <a:cs typeface="Times New Roman" panose="02020603050405020304" pitchFamily="18" charset="0"/>
-              </a:rPr>
-              <a:t>public class </a:t>
-            </a:r>
-            <a:r>
-              <a:rPr lang="en-US" altLang="zh-TW" dirty="0" err="1">
-                <a:solidFill>
-                  <a:schemeClr val="tx1"/>
-                </a:solidFill>
-                <a:latin typeface="Times New Roman" panose="02020603050405020304" pitchFamily="18" charset="0"/>
-                <a:ea typeface="標楷體" panose="03000509000000000000" pitchFamily="65" charset="-120"/>
-                <a:cs typeface="Times New Roman" panose="02020603050405020304" pitchFamily="18" charset="0"/>
-              </a:rPr>
-              <a:t>GreetService</a:t>
-            </a:r>
-            <a:r>
-              <a:rPr lang="en-US" altLang="zh-TW" dirty="0">
-                <a:solidFill>
-                  <a:schemeClr val="tx1"/>
-                </a:solidFill>
-                <a:latin typeface="Times New Roman" panose="02020603050405020304" pitchFamily="18" charset="0"/>
-                <a:ea typeface="標楷體" panose="03000509000000000000" pitchFamily="65" charset="-120"/>
-                <a:cs typeface="Times New Roman" panose="02020603050405020304" pitchFamily="18" charset="0"/>
-              </a:rPr>
-              <a:t> {</a:t>
-            </a:r>
-          </a:p>
-          <a:p>
-            <a:r>
-              <a:rPr lang="en-US" altLang="zh-TW" dirty="0">
-                <a:solidFill>
-                  <a:schemeClr val="tx1"/>
-                </a:solidFill>
-                <a:latin typeface="Times New Roman" panose="02020603050405020304" pitchFamily="18" charset="0"/>
-                <a:ea typeface="標楷體" panose="03000509000000000000" pitchFamily="65" charset="-120"/>
-                <a:cs typeface="Times New Roman" panose="02020603050405020304" pitchFamily="18" charset="0"/>
-              </a:rPr>
-              <a:t>    @Autowired</a:t>
-            </a:r>
-          </a:p>
-          <a:p>
-            <a:r>
-              <a:rPr lang="en-US" altLang="zh-TW" dirty="0">
-                <a:solidFill>
-                  <a:schemeClr val="tx1"/>
-                </a:solidFill>
-                <a:latin typeface="Times New Roman" panose="02020603050405020304" pitchFamily="18" charset="0"/>
-                <a:ea typeface="標楷體" panose="03000509000000000000" pitchFamily="65" charset="-120"/>
-                <a:cs typeface="Times New Roman" panose="02020603050405020304" pitchFamily="18" charset="0"/>
-              </a:rPr>
-              <a:t>    </a:t>
-            </a:r>
-            <a:r>
-              <a:rPr lang="en-US" altLang="zh-TW" dirty="0">
-                <a:solidFill>
-                  <a:srgbClr val="7030A0"/>
-                </a:solidFill>
-                <a:latin typeface="Times New Roman" panose="02020603050405020304" pitchFamily="18" charset="0"/>
-                <a:ea typeface="標楷體" panose="03000509000000000000" pitchFamily="65" charset="-120"/>
-                <a:cs typeface="Times New Roman" panose="02020603050405020304" pitchFamily="18" charset="0"/>
-              </a:rPr>
-              <a:t>private</a:t>
-            </a:r>
-            <a:r>
-              <a:rPr lang="en-US" altLang="zh-TW" dirty="0">
-                <a:solidFill>
-                  <a:schemeClr val="tx1"/>
-                </a:solidFill>
-                <a:latin typeface="Times New Roman" panose="02020603050405020304" pitchFamily="18" charset="0"/>
-                <a:ea typeface="標楷體" panose="03000509000000000000" pitchFamily="65" charset="-120"/>
-                <a:cs typeface="Times New Roman" panose="02020603050405020304" pitchFamily="18" charset="0"/>
-              </a:rPr>
-              <a:t> </a:t>
-            </a:r>
-            <a:r>
-              <a:rPr lang="en-US" altLang="zh-TW" dirty="0" err="1">
-                <a:solidFill>
-                  <a:schemeClr val="tx1"/>
-                </a:solidFill>
-                <a:latin typeface="Times New Roman" panose="02020603050405020304" pitchFamily="18" charset="0"/>
-                <a:ea typeface="標楷體" panose="03000509000000000000" pitchFamily="65" charset="-120"/>
-                <a:cs typeface="Times New Roman" panose="02020603050405020304" pitchFamily="18" charset="0"/>
-              </a:rPr>
-              <a:t>NameRepository</a:t>
-            </a:r>
-            <a:r>
-              <a:rPr lang="en-US" altLang="zh-TW" dirty="0">
-                <a:solidFill>
-                  <a:schemeClr val="tx1"/>
-                </a:solidFill>
-                <a:latin typeface="Times New Roman" panose="02020603050405020304" pitchFamily="18" charset="0"/>
-                <a:ea typeface="標楷體" panose="03000509000000000000" pitchFamily="65" charset="-120"/>
-                <a:cs typeface="Times New Roman" panose="02020603050405020304" pitchFamily="18" charset="0"/>
-              </a:rPr>
-              <a:t> </a:t>
-            </a:r>
-            <a:r>
-              <a:rPr lang="en-US" altLang="zh-TW" dirty="0" err="1">
-                <a:solidFill>
-                  <a:schemeClr val="tx1"/>
-                </a:solidFill>
-                <a:latin typeface="Times New Roman" panose="02020603050405020304" pitchFamily="18" charset="0"/>
-                <a:ea typeface="標楷體" panose="03000509000000000000" pitchFamily="65" charset="-120"/>
-                <a:cs typeface="Times New Roman" panose="02020603050405020304" pitchFamily="18" charset="0"/>
-              </a:rPr>
-              <a:t>nameRepository</a:t>
-            </a:r>
-            <a:r>
-              <a:rPr lang="en-US" altLang="zh-TW" dirty="0">
-                <a:solidFill>
-                  <a:schemeClr val="tx1"/>
-                </a:solidFill>
-                <a:latin typeface="Times New Roman" panose="02020603050405020304" pitchFamily="18" charset="0"/>
-                <a:ea typeface="標楷體" panose="03000509000000000000" pitchFamily="65" charset="-120"/>
-                <a:cs typeface="Times New Roman" panose="02020603050405020304" pitchFamily="18" charset="0"/>
-              </a:rPr>
-              <a:t>;		 </a:t>
-            </a:r>
-            <a:r>
-              <a:rPr lang="en-US" altLang="zh-TW" dirty="0">
-                <a:solidFill>
-                  <a:schemeClr val="tx1">
-                    <a:lumMod val="50000"/>
-                    <a:lumOff val="50000"/>
-                  </a:schemeClr>
-                </a:solidFill>
-                <a:latin typeface="Times New Roman" panose="02020603050405020304" pitchFamily="18" charset="0"/>
-                <a:ea typeface="標楷體" panose="03000509000000000000" pitchFamily="65" charset="-120"/>
-                <a:cs typeface="Times New Roman" panose="02020603050405020304" pitchFamily="18" charset="0"/>
-              </a:rPr>
-              <a:t>// </a:t>
-            </a:r>
-            <a:r>
-              <a:rPr lang="zh-TW" altLang="en-US" dirty="0">
-                <a:solidFill>
-                  <a:schemeClr val="tx1">
-                    <a:lumMod val="50000"/>
-                    <a:lumOff val="50000"/>
-                  </a:schemeClr>
-                </a:solidFill>
-                <a:latin typeface="Times New Roman" panose="02020603050405020304" pitchFamily="18" charset="0"/>
-                <a:ea typeface="標楷體" panose="03000509000000000000" pitchFamily="65" charset="-120"/>
-                <a:cs typeface="Times New Roman" panose="02020603050405020304" pitchFamily="18" charset="0"/>
-              </a:rPr>
-              <a:t>叫倉庫管理員</a:t>
-            </a:r>
-          </a:p>
-          <a:p>
-            <a:endParaRPr lang="zh-TW" altLang="en-US" dirty="0">
-              <a:solidFill>
-                <a:schemeClr val="tx1"/>
-              </a:solidFill>
-              <a:latin typeface="Times New Roman" panose="02020603050405020304" pitchFamily="18" charset="0"/>
-              <a:ea typeface="標楷體" panose="03000509000000000000" pitchFamily="65" charset="-120"/>
-              <a:cs typeface="Times New Roman" panose="02020603050405020304" pitchFamily="18" charset="0"/>
-            </a:endParaRPr>
-          </a:p>
-          <a:p>
-            <a:r>
-              <a:rPr lang="zh-TW" altLang="en-US" dirty="0">
-                <a:solidFill>
-                  <a:schemeClr val="tx1"/>
-                </a:solidFill>
-                <a:latin typeface="Times New Roman" panose="02020603050405020304" pitchFamily="18" charset="0"/>
-                <a:ea typeface="標楷體" panose="03000509000000000000" pitchFamily="65" charset="-120"/>
-                <a:cs typeface="Times New Roman" panose="02020603050405020304" pitchFamily="18" charset="0"/>
-              </a:rPr>
-              <a:t>    </a:t>
-            </a:r>
-            <a:r>
-              <a:rPr lang="en-US" altLang="zh-TW" dirty="0">
-                <a:solidFill>
-                  <a:srgbClr val="7030A0"/>
-                </a:solidFill>
-                <a:latin typeface="Times New Roman" panose="02020603050405020304" pitchFamily="18" charset="0"/>
-                <a:ea typeface="標楷體" panose="03000509000000000000" pitchFamily="65" charset="-120"/>
-                <a:cs typeface="Times New Roman" panose="02020603050405020304" pitchFamily="18" charset="0"/>
-              </a:rPr>
-              <a:t>public</a:t>
-            </a:r>
-            <a:r>
-              <a:rPr lang="en-US" altLang="zh-TW" dirty="0">
-                <a:solidFill>
-                  <a:schemeClr val="tx1"/>
-                </a:solidFill>
-                <a:latin typeface="Times New Roman" panose="02020603050405020304" pitchFamily="18" charset="0"/>
-                <a:ea typeface="標楷體" panose="03000509000000000000" pitchFamily="65" charset="-120"/>
-                <a:cs typeface="Times New Roman" panose="02020603050405020304" pitchFamily="18" charset="0"/>
-              </a:rPr>
-              <a:t> </a:t>
-            </a:r>
-            <a:r>
-              <a:rPr lang="en-US" altLang="zh-TW" dirty="0">
-                <a:solidFill>
-                  <a:srgbClr val="7030A0"/>
-                </a:solidFill>
-                <a:latin typeface="Times New Roman" panose="02020603050405020304" pitchFamily="18" charset="0"/>
-                <a:ea typeface="標楷體" panose="03000509000000000000" pitchFamily="65" charset="-120"/>
-                <a:cs typeface="Times New Roman" panose="02020603050405020304" pitchFamily="18" charset="0"/>
-              </a:rPr>
-              <a:t>String</a:t>
-            </a:r>
-            <a:r>
-              <a:rPr lang="en-US" altLang="zh-TW" dirty="0">
-                <a:solidFill>
-                  <a:schemeClr val="tx1"/>
-                </a:solidFill>
-                <a:latin typeface="Times New Roman" panose="02020603050405020304" pitchFamily="18" charset="0"/>
-                <a:ea typeface="標楷體" panose="03000509000000000000" pitchFamily="65" charset="-120"/>
-                <a:cs typeface="Times New Roman" panose="02020603050405020304" pitchFamily="18" charset="0"/>
-              </a:rPr>
-              <a:t> </a:t>
-            </a:r>
-            <a:r>
-              <a:rPr lang="en-US" altLang="zh-TW" dirty="0" err="1">
-                <a:solidFill>
-                  <a:schemeClr val="tx1"/>
-                </a:solidFill>
-                <a:latin typeface="Times New Roman" panose="02020603050405020304" pitchFamily="18" charset="0"/>
-                <a:ea typeface="標楷體" panose="03000509000000000000" pitchFamily="65" charset="-120"/>
-                <a:cs typeface="Times New Roman" panose="02020603050405020304" pitchFamily="18" charset="0"/>
-              </a:rPr>
-              <a:t>makeGreeting</a:t>
-            </a:r>
-            <a:r>
-              <a:rPr lang="en-US" altLang="zh-TW" dirty="0">
-                <a:solidFill>
-                  <a:schemeClr val="tx1"/>
-                </a:solidFill>
-                <a:latin typeface="Times New Roman" panose="02020603050405020304" pitchFamily="18" charset="0"/>
-                <a:ea typeface="標楷體" panose="03000509000000000000" pitchFamily="65" charset="-120"/>
-                <a:cs typeface="Times New Roman" panose="02020603050405020304" pitchFamily="18" charset="0"/>
-              </a:rPr>
-              <a:t>() {</a:t>
-            </a:r>
-          </a:p>
-          <a:p>
-            <a:r>
-              <a:rPr lang="en-US" altLang="zh-TW" dirty="0">
-                <a:solidFill>
-                  <a:schemeClr val="tx1"/>
-                </a:solidFill>
-                <a:latin typeface="Times New Roman" panose="02020603050405020304" pitchFamily="18" charset="0"/>
-                <a:ea typeface="標楷體" panose="03000509000000000000" pitchFamily="65" charset="-120"/>
-                <a:cs typeface="Times New Roman" panose="02020603050405020304" pitchFamily="18" charset="0"/>
-              </a:rPr>
-              <a:t>        </a:t>
-            </a:r>
-            <a:r>
-              <a:rPr lang="en-US" altLang="zh-TW" dirty="0">
-                <a:solidFill>
-                  <a:srgbClr val="7030A0"/>
-                </a:solidFill>
-                <a:latin typeface="Times New Roman" panose="02020603050405020304" pitchFamily="18" charset="0"/>
-                <a:ea typeface="標楷體" panose="03000509000000000000" pitchFamily="65" charset="-120"/>
-                <a:cs typeface="Times New Roman" panose="02020603050405020304" pitchFamily="18" charset="0"/>
-              </a:rPr>
-              <a:t>String</a:t>
-            </a:r>
-            <a:r>
-              <a:rPr lang="en-US" altLang="zh-TW" dirty="0">
-                <a:solidFill>
-                  <a:schemeClr val="tx1"/>
-                </a:solidFill>
-                <a:latin typeface="Times New Roman" panose="02020603050405020304" pitchFamily="18" charset="0"/>
-                <a:ea typeface="標楷體" panose="03000509000000000000" pitchFamily="65" charset="-120"/>
-                <a:cs typeface="Times New Roman" panose="02020603050405020304" pitchFamily="18" charset="0"/>
-              </a:rPr>
-              <a:t> name = </a:t>
-            </a:r>
-            <a:r>
-              <a:rPr lang="en-US" altLang="zh-TW" dirty="0" err="1">
-                <a:solidFill>
-                  <a:schemeClr val="tx1"/>
-                </a:solidFill>
-                <a:latin typeface="Times New Roman" panose="02020603050405020304" pitchFamily="18" charset="0"/>
-                <a:ea typeface="標楷體" panose="03000509000000000000" pitchFamily="65" charset="-120"/>
-                <a:cs typeface="Times New Roman" panose="02020603050405020304" pitchFamily="18" charset="0"/>
-              </a:rPr>
-              <a:t>nameRepository.getNameFromDB</a:t>
-            </a:r>
-            <a:r>
-              <a:rPr lang="en-US" altLang="zh-TW" dirty="0">
-                <a:solidFill>
-                  <a:schemeClr val="tx1"/>
-                </a:solidFill>
-                <a:latin typeface="Times New Roman" panose="02020603050405020304" pitchFamily="18" charset="0"/>
-                <a:ea typeface="標楷體" panose="03000509000000000000" pitchFamily="65" charset="-120"/>
-                <a:cs typeface="Times New Roman" panose="02020603050405020304" pitchFamily="18" charset="0"/>
-              </a:rPr>
-              <a:t>();</a:t>
-            </a:r>
-          </a:p>
-          <a:p>
-            <a:r>
-              <a:rPr lang="en-US" altLang="zh-TW" dirty="0">
-                <a:solidFill>
-                  <a:schemeClr val="tx1"/>
-                </a:solidFill>
-                <a:latin typeface="Times New Roman" panose="02020603050405020304" pitchFamily="18" charset="0"/>
-                <a:ea typeface="標楷體" panose="03000509000000000000" pitchFamily="65" charset="-120"/>
-                <a:cs typeface="Times New Roman" panose="02020603050405020304" pitchFamily="18" charset="0"/>
-              </a:rPr>
-              <a:t>        return "</a:t>
-            </a:r>
-            <a:r>
-              <a:rPr lang="zh-TW" altLang="en-US" dirty="0">
-                <a:solidFill>
-                  <a:schemeClr val="tx1"/>
-                </a:solidFill>
-                <a:latin typeface="Times New Roman" panose="02020603050405020304" pitchFamily="18" charset="0"/>
-                <a:ea typeface="標楷體" panose="03000509000000000000" pitchFamily="65" charset="-120"/>
-                <a:cs typeface="Times New Roman" panose="02020603050405020304" pitchFamily="18" charset="0"/>
-              </a:rPr>
-              <a:t>你好</a:t>
-            </a:r>
-            <a:r>
-              <a:rPr lang="en-US" altLang="zh-TW" dirty="0">
-                <a:solidFill>
-                  <a:schemeClr val="tx1"/>
-                </a:solidFill>
-                <a:latin typeface="Times New Roman" panose="02020603050405020304" pitchFamily="18" charset="0"/>
-                <a:ea typeface="標楷體" panose="03000509000000000000" pitchFamily="65" charset="-120"/>
-                <a:cs typeface="Times New Roman" panose="02020603050405020304" pitchFamily="18" charset="0"/>
-              </a:rPr>
-              <a:t>, " + name + "</a:t>
-            </a:r>
-            <a:r>
-              <a:rPr lang="zh-TW" altLang="en-US" dirty="0">
-                <a:solidFill>
-                  <a:schemeClr val="tx1"/>
-                </a:solidFill>
-                <a:latin typeface="Times New Roman" panose="02020603050405020304" pitchFamily="18" charset="0"/>
-                <a:ea typeface="標楷體" panose="03000509000000000000" pitchFamily="65" charset="-120"/>
-                <a:cs typeface="Times New Roman" panose="02020603050405020304" pitchFamily="18" charset="0"/>
-              </a:rPr>
-              <a:t>！歡迎光臨。</a:t>
-            </a:r>
-            <a:r>
-              <a:rPr lang="en-US" altLang="zh-TW" dirty="0">
-                <a:solidFill>
-                  <a:schemeClr val="tx1"/>
-                </a:solidFill>
-                <a:latin typeface="Times New Roman" panose="02020603050405020304" pitchFamily="18" charset="0"/>
-                <a:ea typeface="標楷體" panose="03000509000000000000" pitchFamily="65" charset="-120"/>
-                <a:cs typeface="Times New Roman" panose="02020603050405020304" pitchFamily="18" charset="0"/>
-              </a:rPr>
-              <a:t>"; 	</a:t>
-            </a:r>
-            <a:r>
-              <a:rPr lang="en-US" altLang="zh-TW" dirty="0">
-                <a:solidFill>
-                  <a:schemeClr val="tx1">
-                    <a:lumMod val="50000"/>
-                    <a:lumOff val="50000"/>
-                  </a:schemeClr>
-                </a:solidFill>
-                <a:latin typeface="Times New Roman" panose="02020603050405020304" pitchFamily="18" charset="0"/>
-                <a:ea typeface="標楷體" panose="03000509000000000000" pitchFamily="65" charset="-120"/>
-                <a:cs typeface="Times New Roman" panose="02020603050405020304" pitchFamily="18" charset="0"/>
-              </a:rPr>
-              <a:t>// </a:t>
-            </a:r>
-            <a:r>
-              <a:rPr lang="zh-TW" altLang="en-US" dirty="0">
-                <a:solidFill>
-                  <a:schemeClr val="tx1">
-                    <a:lumMod val="50000"/>
-                    <a:lumOff val="50000"/>
-                  </a:schemeClr>
-                </a:solidFill>
-                <a:latin typeface="Times New Roman" panose="02020603050405020304" pitchFamily="18" charset="0"/>
-                <a:ea typeface="標楷體" panose="03000509000000000000" pitchFamily="65" charset="-120"/>
-                <a:cs typeface="Times New Roman" panose="02020603050405020304" pitchFamily="18" charset="0"/>
-              </a:rPr>
-              <a:t>處理邏輯</a:t>
-            </a:r>
-          </a:p>
-          <a:p>
-            <a:r>
-              <a:rPr lang="zh-TW" altLang="en-US" dirty="0">
-                <a:solidFill>
-                  <a:schemeClr val="tx1"/>
-                </a:solidFill>
-                <a:latin typeface="Times New Roman" panose="02020603050405020304" pitchFamily="18" charset="0"/>
-                <a:ea typeface="標楷體" panose="03000509000000000000" pitchFamily="65" charset="-120"/>
-                <a:cs typeface="Times New Roman" panose="02020603050405020304" pitchFamily="18" charset="0"/>
-              </a:rPr>
-              <a:t>    </a:t>
-            </a:r>
-            <a:r>
-              <a:rPr lang="en-US" altLang="zh-TW" dirty="0">
-                <a:solidFill>
-                  <a:schemeClr val="tx1"/>
-                </a:solidFill>
-                <a:latin typeface="Times New Roman" panose="02020603050405020304" pitchFamily="18" charset="0"/>
-                <a:ea typeface="標楷體" panose="03000509000000000000" pitchFamily="65" charset="-120"/>
-                <a:cs typeface="Times New Roman" panose="02020603050405020304" pitchFamily="18" charset="0"/>
-              </a:rPr>
-              <a:t>}</a:t>
-            </a:r>
-          </a:p>
-          <a:p>
-            <a:r>
-              <a:rPr lang="en-US" altLang="zh-TW" dirty="0">
-                <a:solidFill>
-                  <a:schemeClr val="tx1"/>
-                </a:solidFill>
-                <a:latin typeface="Times New Roman" panose="02020603050405020304" pitchFamily="18" charset="0"/>
-                <a:ea typeface="標楷體" panose="03000509000000000000" pitchFamily="65" charset="-120"/>
-                <a:cs typeface="Times New Roman" panose="02020603050405020304" pitchFamily="18" charset="0"/>
-              </a:rPr>
-              <a:t>}</a:t>
-            </a:r>
-            <a:endParaRPr lang="zh-TW" altLang="en-US" dirty="0">
-              <a:solidFill>
-                <a:schemeClr val="tx1"/>
-              </a:solidFill>
-              <a:latin typeface="Times New Roman" panose="02020603050405020304" pitchFamily="18" charset="0"/>
-              <a:ea typeface="標楷體" panose="03000509000000000000" pitchFamily="65" charset="-120"/>
-              <a:cs typeface="Times New Roman" panose="02020603050405020304" pitchFamily="18" charset="0"/>
-            </a:endParaRPr>
-          </a:p>
-        </p:txBody>
-      </p:sp>
-      <p:sp>
-        <p:nvSpPr>
-          <p:cNvPr id="4" name="投影片編號版面配置區 3">
-            <a:extLst>
-              <a:ext uri="{FF2B5EF4-FFF2-40B4-BE49-F238E27FC236}">
-                <a16:creationId xmlns:a16="http://schemas.microsoft.com/office/drawing/2014/main" id="{C6155C68-709E-B746-6A99-513073B36696}"/>
-              </a:ext>
-            </a:extLst>
-          </p:cNvPr>
-          <p:cNvSpPr>
-            <a:spLocks noGrp="1"/>
-          </p:cNvSpPr>
-          <p:nvPr>
-            <p:ph type="sldNum" sz="quarter" idx="12"/>
-          </p:nvPr>
-        </p:nvSpPr>
-        <p:spPr/>
-        <p:txBody>
-          <a:bodyPr/>
-          <a:lstStyle/>
-          <a:p>
-            <a:fld id="{87D5BEE6-8A42-470F-9B73-3A0C6CCA84ED}" type="slidenum">
-              <a:rPr lang="zh-TW" altLang="en-US" smtClean="0"/>
-              <a:t>15</a:t>
-            </a:fld>
-            <a:endParaRPr lang="zh-TW" altLang="en-US"/>
-          </a:p>
-        </p:txBody>
-      </p:sp>
-    </p:spTree>
-    <p:extLst>
-      <p:ext uri="{BB962C8B-B14F-4D97-AF65-F5344CB8AC3E}">
-        <p14:creationId xmlns:p14="http://schemas.microsoft.com/office/powerpoint/2010/main" val="1417453766"/>
-      </p:ext>
-    </p:extLst>
-  </p:cSld>
-  <p:clrMapOvr>
-    <a:masterClrMapping/>
-  </p:clrMapOvr>
-</p:sld>
-</file>
-
-<file path=ppt/slides/slide16.xml><?xml version="1.0" encoding="utf-8"?>
-<p:sld xmlns:a="http://schemas.openxmlformats.org/drawingml/2006/main" xmlns:r="http://schemas.openxmlformats.org/officeDocument/2006/relationships" xmlns:p="http://schemas.openxmlformats.org/presentationml/2006/main" show="0">
-  <p:cSld>
-    <p:spTree>
-      <p:nvGrpSpPr>
-        <p:cNvPr id="1" name=""/>
-        <p:cNvGrpSpPr/>
-        <p:nvPr/>
-      </p:nvGrpSpPr>
-      <p:grpSpPr>
-        <a:xfrm>
-          <a:off x="0" y="0"/>
-          <a:ext cx="0" cy="0"/>
-          <a:chOff x="0" y="0"/>
-          <a:chExt cx="0" cy="0"/>
-        </a:xfrm>
-      </p:grpSpPr>
-      <p:sp>
-        <p:nvSpPr>
-          <p:cNvPr id="2" name="標題 1">
-            <a:extLst>
-              <a:ext uri="{FF2B5EF4-FFF2-40B4-BE49-F238E27FC236}">
-                <a16:creationId xmlns:a16="http://schemas.microsoft.com/office/drawing/2014/main" id="{27182EBD-7490-EF5C-09FF-B751264408F3}"/>
-              </a:ext>
-            </a:extLst>
-          </p:cNvPr>
-          <p:cNvSpPr>
-            <a:spLocks noGrp="1"/>
-          </p:cNvSpPr>
-          <p:nvPr>
-            <p:ph type="title"/>
-          </p:nvPr>
-        </p:nvSpPr>
-        <p:spPr/>
-        <p:txBody>
-          <a:bodyPr>
-            <a:normAutofit/>
-          </a:bodyPr>
-          <a:lstStyle/>
-          <a:p>
-            <a:r>
-              <a:rPr lang="zh-TW" altLang="en-US" b="1" i="0" dirty="0">
-                <a:solidFill>
-                  <a:schemeClr val="tx1"/>
-                </a:solidFill>
-                <a:effectLst/>
-                <a:latin typeface="Times New Roman" panose="02020603050405020304" pitchFamily="18" charset="0"/>
-                <a:ea typeface="標楷體" panose="03000509000000000000" pitchFamily="65" charset="-120"/>
-                <a:cs typeface="Times New Roman" panose="02020603050405020304" pitchFamily="18" charset="0"/>
-              </a:rPr>
-              <a:t>範例程式拆解 </a:t>
-            </a:r>
-            <a:r>
-              <a:rPr lang="en-US" altLang="zh-TW" b="1" i="0" dirty="0">
-                <a:solidFill>
-                  <a:schemeClr val="tx1"/>
-                </a:solidFill>
-                <a:effectLst/>
-                <a:latin typeface="Times New Roman" panose="02020603050405020304" pitchFamily="18" charset="0"/>
-                <a:ea typeface="標楷體" panose="03000509000000000000" pitchFamily="65" charset="-120"/>
-                <a:cs typeface="Times New Roman" panose="02020603050405020304" pitchFamily="18" charset="0"/>
-              </a:rPr>
-              <a:t>(</a:t>
-            </a:r>
-            <a:r>
-              <a:rPr lang="zh-TW" altLang="en-US" b="1" dirty="0">
-                <a:solidFill>
-                  <a:schemeClr val="tx1"/>
-                </a:solidFill>
-                <a:latin typeface="Times New Roman" panose="02020603050405020304" pitchFamily="18" charset="0"/>
-                <a:ea typeface="標楷體" panose="03000509000000000000" pitchFamily="65" charset="-120"/>
-                <a:cs typeface="Times New Roman" panose="02020603050405020304" pitchFamily="18" charset="0"/>
-              </a:rPr>
-              <a:t>三</a:t>
-            </a:r>
-            <a:r>
-              <a:rPr lang="en-US" altLang="zh-TW" b="1" i="0" dirty="0">
-                <a:solidFill>
-                  <a:schemeClr val="tx1"/>
-                </a:solidFill>
-                <a:effectLst/>
-                <a:latin typeface="Times New Roman" panose="02020603050405020304" pitchFamily="18" charset="0"/>
-                <a:ea typeface="標楷體" panose="03000509000000000000" pitchFamily="65" charset="-120"/>
-                <a:cs typeface="Times New Roman" panose="02020603050405020304" pitchFamily="18" charset="0"/>
-              </a:rPr>
-              <a:t>)</a:t>
-            </a:r>
-            <a:r>
-              <a:rPr lang="zh-TW" altLang="en-US" b="1" i="0" dirty="0">
-                <a:solidFill>
-                  <a:srgbClr val="D4D4D4"/>
-                </a:solidFill>
-                <a:effectLst/>
-                <a:latin typeface="Inter"/>
-              </a:rPr>
-              <a:t> </a:t>
-            </a:r>
-            <a:br>
-              <a:rPr lang="en-US" altLang="zh-TW" b="1" i="0" dirty="0">
-                <a:solidFill>
-                  <a:srgbClr val="D4D4D4"/>
-                </a:solidFill>
-                <a:effectLst/>
-                <a:latin typeface="Inter"/>
-              </a:rPr>
-            </a:br>
-            <a:r>
-              <a:rPr lang="en-US" altLang="zh-TW" sz="2400" b="1" i="0" dirty="0">
-                <a:solidFill>
-                  <a:schemeClr val="tx1"/>
-                </a:solidFill>
-                <a:effectLst/>
-                <a:latin typeface="Times New Roman" panose="02020603050405020304" pitchFamily="18" charset="0"/>
-                <a:ea typeface="標楷體" panose="03000509000000000000" pitchFamily="65" charset="-120"/>
-                <a:cs typeface="Times New Roman" panose="02020603050405020304" pitchFamily="18" charset="0"/>
-              </a:rPr>
-              <a:t>Repository </a:t>
-            </a:r>
-            <a:r>
-              <a:rPr lang="zh-TW" altLang="en-US" sz="2400" b="1" i="0" dirty="0">
-                <a:solidFill>
-                  <a:schemeClr val="tx1"/>
-                </a:solidFill>
-                <a:effectLst/>
-                <a:latin typeface="Times New Roman" panose="02020603050405020304" pitchFamily="18" charset="0"/>
-                <a:ea typeface="標楷體" panose="03000509000000000000" pitchFamily="65" charset="-120"/>
-                <a:cs typeface="Times New Roman" panose="02020603050405020304" pitchFamily="18" charset="0"/>
-              </a:rPr>
-              <a:t>層</a:t>
-            </a:r>
-            <a:r>
-              <a:rPr lang="zh-TW" altLang="en-US" sz="2400" b="0" i="0" dirty="0">
-                <a:solidFill>
-                  <a:schemeClr val="tx1"/>
-                </a:solidFill>
-                <a:effectLst/>
-                <a:latin typeface="Times New Roman" panose="02020603050405020304" pitchFamily="18" charset="0"/>
-                <a:ea typeface="標楷體" panose="03000509000000000000" pitchFamily="65" charset="-120"/>
-                <a:cs typeface="Times New Roman" panose="02020603050405020304" pitchFamily="18" charset="0"/>
-              </a:rPr>
-              <a:t>：假設資料庫裡有一個名字。</a:t>
-            </a:r>
-            <a:endParaRPr lang="zh-TW" altLang="en-US" dirty="0">
-              <a:solidFill>
-                <a:schemeClr val="tx1"/>
-              </a:solidFill>
-              <a:latin typeface="Times New Roman" panose="02020603050405020304" pitchFamily="18" charset="0"/>
-              <a:ea typeface="標楷體" panose="03000509000000000000" pitchFamily="65" charset="-120"/>
-              <a:cs typeface="Times New Roman" panose="02020603050405020304" pitchFamily="18" charset="0"/>
-            </a:endParaRPr>
-          </a:p>
-        </p:txBody>
-      </p:sp>
-      <p:sp>
-        <p:nvSpPr>
-          <p:cNvPr id="3" name="內容版面配置區 2">
-            <a:extLst>
-              <a:ext uri="{FF2B5EF4-FFF2-40B4-BE49-F238E27FC236}">
-                <a16:creationId xmlns:a16="http://schemas.microsoft.com/office/drawing/2014/main" id="{8E1DD6A1-3682-5B39-73DD-C826C29E366B}"/>
-              </a:ext>
-            </a:extLst>
-          </p:cNvPr>
-          <p:cNvSpPr>
-            <a:spLocks noGrp="1"/>
-          </p:cNvSpPr>
-          <p:nvPr>
-            <p:ph idx="1"/>
-          </p:nvPr>
-        </p:nvSpPr>
-        <p:spPr/>
-        <p:txBody>
-          <a:bodyPr/>
-          <a:lstStyle/>
-          <a:p>
-            <a:r>
-              <a:rPr lang="zh-TW" altLang="en-US" sz="2000" b="0" i="0" dirty="0">
-                <a:solidFill>
-                  <a:schemeClr val="tx1"/>
-                </a:solidFill>
-                <a:effectLst/>
-                <a:latin typeface="Times New Roman" panose="02020603050405020304" pitchFamily="18" charset="0"/>
-                <a:ea typeface="標楷體" panose="03000509000000000000" pitchFamily="65" charset="-120"/>
-                <a:cs typeface="Times New Roman" panose="02020603050405020304" pitchFamily="18" charset="0"/>
-              </a:rPr>
-              <a:t>用一個簡單的「問候系統」展示資料怎麼傳遞。</a:t>
-            </a:r>
-            <a:endParaRPr lang="en-US" altLang="zh-TW" dirty="0">
-              <a:solidFill>
-                <a:schemeClr val="tx1"/>
-              </a:solidFill>
-              <a:latin typeface="Times New Roman" panose="02020603050405020304" pitchFamily="18" charset="0"/>
-              <a:ea typeface="標楷體" panose="03000509000000000000" pitchFamily="65" charset="-120"/>
-              <a:cs typeface="Times New Roman" panose="02020603050405020304" pitchFamily="18" charset="0"/>
-            </a:endParaRPr>
-          </a:p>
-          <a:p>
-            <a:r>
-              <a:rPr lang="en-US" altLang="zh-TW" dirty="0">
-                <a:solidFill>
-                  <a:srgbClr val="FF0000"/>
-                </a:solidFill>
-                <a:latin typeface="Times New Roman" panose="02020603050405020304" pitchFamily="18" charset="0"/>
-                <a:ea typeface="標楷體" panose="03000509000000000000" pitchFamily="65" charset="-120"/>
-                <a:cs typeface="Times New Roman" panose="02020603050405020304" pitchFamily="18" charset="0"/>
-              </a:rPr>
-              <a:t>@Repository</a:t>
-            </a:r>
-          </a:p>
-          <a:p>
-            <a:r>
-              <a:rPr lang="en-US" altLang="zh-TW" dirty="0">
-                <a:solidFill>
-                  <a:srgbClr val="7030A0"/>
-                </a:solidFill>
-                <a:latin typeface="Times New Roman" panose="02020603050405020304" pitchFamily="18" charset="0"/>
-                <a:ea typeface="標楷體" panose="03000509000000000000" pitchFamily="65" charset="-120"/>
-                <a:cs typeface="Times New Roman" panose="02020603050405020304" pitchFamily="18" charset="0"/>
-              </a:rPr>
-              <a:t>public class </a:t>
-            </a:r>
-            <a:r>
-              <a:rPr lang="en-US" altLang="zh-TW" dirty="0" err="1">
-                <a:solidFill>
-                  <a:schemeClr val="tx1"/>
-                </a:solidFill>
-                <a:latin typeface="Times New Roman" panose="02020603050405020304" pitchFamily="18" charset="0"/>
-                <a:ea typeface="標楷體" panose="03000509000000000000" pitchFamily="65" charset="-120"/>
-                <a:cs typeface="Times New Roman" panose="02020603050405020304" pitchFamily="18" charset="0"/>
-              </a:rPr>
-              <a:t>NameRepository</a:t>
-            </a:r>
-            <a:r>
-              <a:rPr lang="en-US" altLang="zh-TW" dirty="0">
-                <a:solidFill>
-                  <a:schemeClr val="tx1"/>
-                </a:solidFill>
-                <a:latin typeface="Times New Roman" panose="02020603050405020304" pitchFamily="18" charset="0"/>
-                <a:ea typeface="標楷體" panose="03000509000000000000" pitchFamily="65" charset="-120"/>
-                <a:cs typeface="Times New Roman" panose="02020603050405020304" pitchFamily="18" charset="0"/>
-              </a:rPr>
-              <a:t> {</a:t>
-            </a:r>
-          </a:p>
-          <a:p>
-            <a:r>
-              <a:rPr lang="en-US" altLang="zh-TW" dirty="0">
-                <a:solidFill>
-                  <a:schemeClr val="tx1"/>
-                </a:solidFill>
-                <a:latin typeface="Times New Roman" panose="02020603050405020304" pitchFamily="18" charset="0"/>
-                <a:ea typeface="標楷體" panose="03000509000000000000" pitchFamily="65" charset="-120"/>
-                <a:cs typeface="Times New Roman" panose="02020603050405020304" pitchFamily="18" charset="0"/>
-              </a:rPr>
-              <a:t>    </a:t>
-            </a:r>
-            <a:r>
-              <a:rPr lang="en-US" altLang="zh-TW" dirty="0">
-                <a:solidFill>
-                  <a:srgbClr val="7030A0"/>
-                </a:solidFill>
-                <a:latin typeface="Times New Roman" panose="02020603050405020304" pitchFamily="18" charset="0"/>
-                <a:ea typeface="標楷體" panose="03000509000000000000" pitchFamily="65" charset="-120"/>
-                <a:cs typeface="Times New Roman" panose="02020603050405020304" pitchFamily="18" charset="0"/>
-              </a:rPr>
-              <a:t>public String </a:t>
-            </a:r>
-            <a:r>
-              <a:rPr lang="en-US" altLang="zh-TW" dirty="0" err="1">
-                <a:solidFill>
-                  <a:schemeClr val="tx1"/>
-                </a:solidFill>
-                <a:latin typeface="Times New Roman" panose="02020603050405020304" pitchFamily="18" charset="0"/>
-                <a:ea typeface="標楷體" panose="03000509000000000000" pitchFamily="65" charset="-120"/>
-                <a:cs typeface="Times New Roman" panose="02020603050405020304" pitchFamily="18" charset="0"/>
-              </a:rPr>
-              <a:t>getNameFromDB</a:t>
-            </a:r>
-            <a:r>
-              <a:rPr lang="en-US" altLang="zh-TW" dirty="0">
-                <a:solidFill>
-                  <a:schemeClr val="tx1"/>
-                </a:solidFill>
-                <a:latin typeface="Times New Roman" panose="02020603050405020304" pitchFamily="18" charset="0"/>
-                <a:ea typeface="標楷體" panose="03000509000000000000" pitchFamily="65" charset="-120"/>
-                <a:cs typeface="Times New Roman" panose="02020603050405020304" pitchFamily="18" charset="0"/>
-              </a:rPr>
-              <a:t>() {</a:t>
-            </a:r>
-          </a:p>
-          <a:p>
-            <a:r>
-              <a:rPr lang="en-US" altLang="zh-TW" dirty="0">
-                <a:solidFill>
-                  <a:schemeClr val="tx1"/>
-                </a:solidFill>
-                <a:latin typeface="Times New Roman" panose="02020603050405020304" pitchFamily="18" charset="0"/>
-                <a:ea typeface="標楷體" panose="03000509000000000000" pitchFamily="65" charset="-120"/>
-                <a:cs typeface="Times New Roman" panose="02020603050405020304" pitchFamily="18" charset="0"/>
-              </a:rPr>
-              <a:t>        return "</a:t>
-            </a:r>
-            <a:r>
-              <a:rPr lang="zh-TW" altLang="en-US" dirty="0">
-                <a:solidFill>
-                  <a:schemeClr val="tx1"/>
-                </a:solidFill>
-                <a:latin typeface="Times New Roman" panose="02020603050405020304" pitchFamily="18" charset="0"/>
-                <a:ea typeface="標楷體" panose="03000509000000000000" pitchFamily="65" charset="-120"/>
-                <a:cs typeface="Times New Roman" panose="02020603050405020304" pitchFamily="18" charset="0"/>
-              </a:rPr>
-              <a:t>王小明</a:t>
-            </a:r>
-            <a:r>
-              <a:rPr lang="en-US" altLang="zh-TW" dirty="0">
-                <a:solidFill>
-                  <a:schemeClr val="tx1"/>
-                </a:solidFill>
-                <a:latin typeface="Times New Roman" panose="02020603050405020304" pitchFamily="18" charset="0"/>
-                <a:ea typeface="標楷體" panose="03000509000000000000" pitchFamily="65" charset="-120"/>
-                <a:cs typeface="Times New Roman" panose="02020603050405020304" pitchFamily="18" charset="0"/>
-              </a:rPr>
-              <a:t>"; 		</a:t>
-            </a:r>
-            <a:r>
-              <a:rPr lang="en-US" altLang="zh-TW" dirty="0">
-                <a:solidFill>
-                  <a:schemeClr val="tx1">
-                    <a:lumMod val="50000"/>
-                    <a:lumOff val="50000"/>
-                  </a:schemeClr>
-                </a:solidFill>
-                <a:latin typeface="Times New Roman" panose="02020603050405020304" pitchFamily="18" charset="0"/>
-                <a:ea typeface="標楷體" panose="03000509000000000000" pitchFamily="65" charset="-120"/>
-                <a:cs typeface="Times New Roman" panose="02020603050405020304" pitchFamily="18" charset="0"/>
-              </a:rPr>
-              <a:t>// </a:t>
-            </a:r>
-            <a:r>
-              <a:rPr lang="zh-TW" altLang="en-US" dirty="0">
-                <a:solidFill>
-                  <a:schemeClr val="tx1">
-                    <a:lumMod val="50000"/>
-                    <a:lumOff val="50000"/>
-                  </a:schemeClr>
-                </a:solidFill>
-                <a:latin typeface="Times New Roman" panose="02020603050405020304" pitchFamily="18" charset="0"/>
-                <a:ea typeface="標楷體" panose="03000509000000000000" pitchFamily="65" charset="-120"/>
-                <a:cs typeface="Times New Roman" panose="02020603050405020304" pitchFamily="18" charset="0"/>
-              </a:rPr>
-              <a:t>模擬從資料庫拿資料</a:t>
-            </a:r>
-          </a:p>
-          <a:p>
-            <a:r>
-              <a:rPr lang="zh-TW" altLang="en-US" dirty="0">
-                <a:solidFill>
-                  <a:schemeClr val="tx1"/>
-                </a:solidFill>
-                <a:latin typeface="Times New Roman" panose="02020603050405020304" pitchFamily="18" charset="0"/>
-                <a:ea typeface="標楷體" panose="03000509000000000000" pitchFamily="65" charset="-120"/>
-                <a:cs typeface="Times New Roman" panose="02020603050405020304" pitchFamily="18" charset="0"/>
-              </a:rPr>
-              <a:t>    </a:t>
-            </a:r>
-            <a:r>
-              <a:rPr lang="en-US" altLang="zh-TW" dirty="0">
-                <a:solidFill>
-                  <a:schemeClr val="tx1"/>
-                </a:solidFill>
-                <a:latin typeface="Times New Roman" panose="02020603050405020304" pitchFamily="18" charset="0"/>
-                <a:ea typeface="標楷體" panose="03000509000000000000" pitchFamily="65" charset="-120"/>
-                <a:cs typeface="Times New Roman" panose="02020603050405020304" pitchFamily="18" charset="0"/>
-              </a:rPr>
-              <a:t>}</a:t>
-            </a:r>
-          </a:p>
-          <a:p>
-            <a:r>
-              <a:rPr lang="en-US" altLang="zh-TW" dirty="0">
-                <a:solidFill>
-                  <a:schemeClr val="tx1"/>
-                </a:solidFill>
-                <a:latin typeface="Times New Roman" panose="02020603050405020304" pitchFamily="18" charset="0"/>
-                <a:ea typeface="標楷體" panose="03000509000000000000" pitchFamily="65" charset="-120"/>
-                <a:cs typeface="Times New Roman" panose="02020603050405020304" pitchFamily="18" charset="0"/>
-              </a:rPr>
-              <a:t>}</a:t>
-            </a:r>
-            <a:endParaRPr lang="zh-TW" altLang="en-US" dirty="0">
-              <a:solidFill>
-                <a:schemeClr val="tx1"/>
-              </a:solidFill>
-              <a:latin typeface="Times New Roman" panose="02020603050405020304" pitchFamily="18" charset="0"/>
-              <a:ea typeface="標楷體" panose="03000509000000000000" pitchFamily="65" charset="-120"/>
-              <a:cs typeface="Times New Roman" panose="02020603050405020304" pitchFamily="18" charset="0"/>
-            </a:endParaRPr>
-          </a:p>
-        </p:txBody>
-      </p:sp>
-      <p:sp>
-        <p:nvSpPr>
-          <p:cNvPr id="4" name="投影片編號版面配置區 3">
-            <a:extLst>
-              <a:ext uri="{FF2B5EF4-FFF2-40B4-BE49-F238E27FC236}">
-                <a16:creationId xmlns:a16="http://schemas.microsoft.com/office/drawing/2014/main" id="{2457C7BC-854A-14E7-117B-B5AD436F1FF9}"/>
-              </a:ext>
-            </a:extLst>
-          </p:cNvPr>
-          <p:cNvSpPr>
-            <a:spLocks noGrp="1"/>
-          </p:cNvSpPr>
-          <p:nvPr>
-            <p:ph type="sldNum" sz="quarter" idx="12"/>
-          </p:nvPr>
-        </p:nvSpPr>
-        <p:spPr/>
-        <p:txBody>
-          <a:bodyPr/>
-          <a:lstStyle/>
-          <a:p>
-            <a:fld id="{87D5BEE6-8A42-470F-9B73-3A0C6CCA84ED}" type="slidenum">
-              <a:rPr lang="zh-TW" altLang="en-US" smtClean="0"/>
-              <a:t>16</a:t>
-            </a:fld>
-            <a:endParaRPr lang="zh-TW" altLang="en-US"/>
-          </a:p>
-        </p:txBody>
-      </p:sp>
-    </p:spTree>
-    <p:extLst>
-      <p:ext uri="{BB962C8B-B14F-4D97-AF65-F5344CB8AC3E}">
-        <p14:creationId xmlns:p14="http://schemas.microsoft.com/office/powerpoint/2010/main" val="86189854"/>
-      </p:ext>
-    </p:extLst>
-  </p:cSld>
-  <p:clrMapOvr>
-    <a:masterClrMapping/>
-  </p:clrMapOvr>
-</p:sld>
-</file>
-
-<file path=ppt/slides/slide17.xml><?xml version="1.0" encoding="utf-8"?>
+<file path=ppt/slides/slide14.xml><?xml version="1.0" encoding="utf-8"?>
 <p:sld xmlns:a="http://schemas.openxmlformats.org/drawingml/2006/main" xmlns:r="http://schemas.openxmlformats.org/officeDocument/2006/relationships" xmlns:p="http://schemas.openxmlformats.org/presentationml/2006/main">
   <p:cSld>
     <p:spTree>
@@ -13503,7 +11413,7 @@
                 <a:ea typeface="標楷體" panose="03000509000000000000" pitchFamily="65" charset="-120"/>
                 <a:cs typeface="Times New Roman" panose="02020603050405020304" pitchFamily="18" charset="0"/>
               </a:rPr>
-              <a:t>17</a:t>
+              <a:t>14</a:t>
             </a:fld>
             <a:endParaRPr lang="zh-TW" altLang="en-US">
               <a:latin typeface="Times New Roman" panose="02020603050405020304" pitchFamily="18" charset="0"/>
@@ -14604,7 +12514,7 @@
 </p:sld>
 </file>
 
-<file path=ppt/slides/slide18.xml><?xml version="1.0" encoding="utf-8"?>
+<file path=ppt/slides/slide15.xml><?xml version="1.0" encoding="utf-8"?>
 <p:sld xmlns:a="http://schemas.openxmlformats.org/drawingml/2006/main" xmlns:r="http://schemas.openxmlformats.org/officeDocument/2006/relationships" xmlns:p="http://schemas.openxmlformats.org/presentationml/2006/main">
   <p:cSld>
     <p:spTree>
@@ -14694,7 +12604,7 @@
                 <a:latin typeface="標楷體" panose="03000509000000000000" pitchFamily="65" charset="-120"/>
                 <a:ea typeface="標楷體" panose="03000509000000000000" pitchFamily="65" charset="-120"/>
               </a:rPr>
-              <a:t>18</a:t>
+              <a:t>15</a:t>
             </a:fld>
             <a:endParaRPr lang="zh-TW" altLang="en-US" sz="1000">
               <a:latin typeface="標楷體" panose="03000509000000000000" pitchFamily="65" charset="-120"/>
@@ -16938,7 +14848,7 @@
         </p:nvSpPr>
         <p:spPr>
           <a:xfrm>
-            <a:off x="2666127" y="2174806"/>
+            <a:off x="1097280" y="2118362"/>
             <a:ext cx="1409699" cy="822960"/>
           </a:xfrm>
           <a:prstGeom prst="rect">
@@ -16998,7 +14908,7 @@
         </p:nvSpPr>
         <p:spPr>
           <a:xfrm>
-            <a:off x="4274857" y="2609145"/>
+            <a:off x="2706010" y="2552701"/>
             <a:ext cx="436842" cy="0"/>
           </a:xfrm>
           <a:prstGeom prst="line">
@@ -17040,7 +14950,7 @@
         </p:nvSpPr>
         <p:spPr>
           <a:xfrm>
-            <a:off x="4900074" y="2197665"/>
+            <a:off x="3331227" y="2141221"/>
             <a:ext cx="1176114" cy="822960"/>
           </a:xfrm>
           <a:prstGeom prst="rect">
@@ -17097,7 +15007,7 @@
         </p:nvSpPr>
         <p:spPr>
           <a:xfrm>
-            <a:off x="6314985" y="2609145"/>
+            <a:off x="4746138" y="2552701"/>
             <a:ext cx="436842" cy="0"/>
           </a:xfrm>
           <a:prstGeom prst="line">
@@ -17139,7 +15049,7 @@
         </p:nvSpPr>
         <p:spPr>
           <a:xfrm>
-            <a:off x="7066279" y="2183271"/>
+            <a:off x="5497432" y="2126827"/>
             <a:ext cx="1176114" cy="822960"/>
           </a:xfrm>
           <a:prstGeom prst="rect">
@@ -17196,7 +15106,7 @@
         </p:nvSpPr>
         <p:spPr>
           <a:xfrm>
-            <a:off x="8450956" y="2609145"/>
+            <a:off x="6882109" y="2552701"/>
             <a:ext cx="436842" cy="0"/>
           </a:xfrm>
           <a:prstGeom prst="line">
@@ -17238,7 +15148,7 @@
         </p:nvSpPr>
         <p:spPr>
           <a:xfrm>
-            <a:off x="9131270" y="2174806"/>
+            <a:off x="7562423" y="2118362"/>
             <a:ext cx="1176114" cy="822960"/>
           </a:xfrm>
           <a:prstGeom prst="rect">
@@ -17295,7 +15205,7 @@
         </p:nvSpPr>
         <p:spPr>
           <a:xfrm>
-            <a:off x="10441361" y="2594751"/>
+            <a:off x="8872514" y="2538307"/>
             <a:ext cx="436842" cy="0"/>
           </a:xfrm>
           <a:prstGeom prst="line">
@@ -17337,7 +15247,7 @@
         </p:nvSpPr>
         <p:spPr>
           <a:xfrm>
-            <a:off x="11012180" y="2174806"/>
+            <a:off x="9443333" y="2118362"/>
             <a:ext cx="1032377" cy="822960"/>
           </a:xfrm>
           <a:prstGeom prst="rect">
@@ -17460,93 +15370,6 @@
               </a:rPr>
               <a:t>2</a:t>
             </a:fld>
-            <a:endParaRPr lang="zh-TW" altLang="en-US">
-              <a:latin typeface="Times New Roman" panose="02020603050405020304" pitchFamily="18" charset="0"/>
-              <a:ea typeface="標楷體" panose="03000509000000000000" pitchFamily="65" charset="-120"/>
-              <a:cs typeface="Times New Roman" panose="02020603050405020304" pitchFamily="18" charset="0"/>
-            </a:endParaRPr>
-          </a:p>
-        </p:txBody>
-      </p:sp>
-      <p:sp>
-        <p:nvSpPr>
-          <p:cNvPr id="19" name="Text 5">
-            <a:extLst>
-              <a:ext uri="{FF2B5EF4-FFF2-40B4-BE49-F238E27FC236}">
-                <a16:creationId xmlns:a16="http://schemas.microsoft.com/office/drawing/2014/main" id="{30A72D7C-8BB7-B85D-0B81-02EE732B965E}"/>
-              </a:ext>
-            </a:extLst>
-          </p:cNvPr>
-          <p:cNvSpPr/>
-          <p:nvPr/>
-        </p:nvSpPr>
-        <p:spPr>
-          <a:xfrm>
-            <a:off x="659356" y="2174806"/>
-            <a:ext cx="1271504" cy="822960"/>
-          </a:xfrm>
-          <a:prstGeom prst="rect">
-            <a:avLst/>
-          </a:prstGeom>
-          <a:solidFill>
-            <a:srgbClr val="FFFFFF"/>
-          </a:solidFill>
-          <a:ln w="15240">
-            <a:solidFill>
-              <a:srgbClr val="168A9A"/>
-            </a:solidFill>
-          </a:ln>
-        </p:spPr>
-        <p:txBody>
-          <a:bodyPr wrap="square" lIns="762" tIns="762" rIns="762" bIns="762" rtlCol="0" anchor="ctr">
-            <a:normAutofit/>
-          </a:bodyPr>
-          <a:lstStyle/>
-          <a:p>
-            <a:r>
-              <a:rPr lang="zh-TW" altLang="en-US" sz="1600" dirty="0">
-                <a:latin typeface="標楷體" panose="03000509000000000000" pitchFamily="65" charset="-120"/>
-                <a:ea typeface="標楷體" panose="03000509000000000000" pitchFamily="65" charset="-120"/>
-              </a:rPr>
-              <a:t>前端發出請求</a:t>
-            </a:r>
-          </a:p>
-        </p:txBody>
-      </p:sp>
-      <p:sp>
-        <p:nvSpPr>
-          <p:cNvPr id="21" name="Shape 6">
-            <a:extLst>
-              <a:ext uri="{FF2B5EF4-FFF2-40B4-BE49-F238E27FC236}">
-                <a16:creationId xmlns:a16="http://schemas.microsoft.com/office/drawing/2014/main" id="{08A952A6-6EB6-0F1C-DA54-E35B6430D7D9}"/>
-              </a:ext>
-            </a:extLst>
-          </p:cNvPr>
-          <p:cNvSpPr/>
-          <p:nvPr/>
-        </p:nvSpPr>
-        <p:spPr>
-          <a:xfrm>
-            <a:off x="2092970" y="2586286"/>
-            <a:ext cx="436842" cy="0"/>
-          </a:xfrm>
-          <a:prstGeom prst="line">
-            <a:avLst/>
-          </a:prstGeom>
-          <a:noFill/>
-          <a:ln w="19050">
-            <a:solidFill>
-              <a:srgbClr val="B9C4CF"/>
-            </a:solidFill>
-            <a:prstDash val="solid"/>
-            <a:headEnd type="none"/>
-            <a:tailEnd type="triangle"/>
-          </a:ln>
-        </p:spPr>
-        <p:txBody>
-          <a:bodyPr/>
-          <a:lstStyle/>
-          <a:p>
             <a:endParaRPr lang="zh-TW" altLang="en-US">
               <a:latin typeface="Times New Roman" panose="02020603050405020304" pitchFamily="18" charset="0"/>
               <a:ea typeface="標楷體" panose="03000509000000000000" pitchFamily="65" charset="-120"/>
@@ -19899,7 +17722,7 @@
         </p:blipFill>
         <p:spPr bwMode="auto">
           <a:xfrm>
-            <a:off x="0" y="4116386"/>
+            <a:off x="0" y="4127675"/>
             <a:ext cx="12192000" cy="2741613"/>
           </a:xfrm>
           <a:prstGeom prst="rect">
